--- a/ml/import_beam/slide/E073_parallel_import_design.pptx
+++ b/ml/import_beam/slide/E073_parallel_import_design.pptx
@@ -502,7 +502,7 @@
           <a:p>
             <a:r>
               <a:rPr lang="en-US" dirty="0"/>
-              <a:t>E-073: import is separated from build. Beam's GroupByKey turns per-host lane caps into a hard bound on concurrent connections. Numbers are from sources.yaml (hosts:) and BUILD_NOTES.md (manifest counts, 2026-09-04).</a:t>
+              <a:t>E-073 revision 2. No Hugging Face Hub: output goes to --output &lt;local dir | gs://…&gt; as sharded tf.train.Example. Two Beam stages. A throttle changes WHEN an item is fetched, never WHETHER — four durable states, no 'failed'. Lane and gap numbers from sources.yaml hosts:; item counts, GB and test counts from BUILD_NOTES.md (2026-09-04).</a:t>
             </a:r>
             <a:endParaRPr lang="en-US" dirty="0"/>
           </a:p>
@@ -883,8 +883,8 @@
         </p:nvSpPr>
         <p:spPr>
           <a:xfrm>
-            <a:off x="384048" y="155448"/>
-            <a:ext cx="11423599" cy="329184"/>
+            <a:off x="384048" y="137160"/>
+            <a:ext cx="11423599" cy="310896"/>
           </a:xfrm>
           <a:prstGeom prst="rect">
             <a:avLst/>
@@ -900,7 +900,7 @@
               <a:buNone/>
             </a:pPr>
             <a:r>
-              <a:rPr lang="en-US" sz="1750" b="1" dirty="0">
+              <a:rPr lang="en-US" sz="1550" b="1" dirty="0">
                 <a:solidFill>
                   <a:srgbClr val="18262B"/>
                 </a:solidFill>
@@ -908,9 +908,9 @@
                 <a:ea typeface="Cambria" pitchFamily="34" charset="-122"/>
                 <a:cs typeface="Cambria" pitchFamily="34" charset="-120"/>
               </a:rPr>
-              <a:t>E-073 · Parallel import of the training data — one Apache Beam pipeline, polite by construction</a:t>
-            </a:r>
-            <a:endParaRPr lang="en-US" sz="1750" dirty="0"/>
+              <a:t>E-073 · Parallel import of the training data — one Apache Beam / Flume pipeline, polite by construction, lossless by design</a:t>
+            </a:r>
+            <a:endParaRPr lang="en-US" sz="1550" dirty="0"/>
           </a:p>
         </p:txBody>
       </p:sp>
@@ -922,8 +922,8 @@
         </p:nvSpPr>
         <p:spPr>
           <a:xfrm>
-            <a:off x="384048" y="502920"/>
-            <a:ext cx="11423599" cy="237744"/>
+            <a:off x="384048" y="466344"/>
+            <a:ext cx="11423599" cy="256032"/>
           </a:xfrm>
           <a:prstGeom prst="rect">
             <a:avLst/>
@@ -947,7 +947,7 @@
                 <a:ea typeface="Calibri" pitchFamily="34" charset="-122"/>
                 <a:cs typeface="Calibri" pitchFamily="34" charset="-120"/>
               </a:rPr>
-              <a:t>Import once into a verified Hub mirror; every tensor build reads the mirror. Beam orchestrates; per-host lane caps set the speed limit.</a:t>
+              <a:t>Import once into a sharded tf.train.Example dataset. Beam orchestrates; per-host lane caps set the speed limit; a throttle changes WHEN an item is fetched, never WHETHER.</a:t>
             </a:r>
             <a:endParaRPr lang="en-US" sz="1150" dirty="0"/>
           </a:p>
@@ -961,8 +961,8 @@
         </p:nvSpPr>
         <p:spPr>
           <a:xfrm>
-            <a:off x="384048" y="1161288"/>
-            <a:ext cx="3611880" cy="4032504"/>
+            <a:off x="384048" y="1097280"/>
+            <a:ext cx="2971800" cy="4114800"/>
           </a:xfrm>
           <a:prstGeom prst="rect">
             <a:avLst/>
@@ -986,8 +986,8 @@
         </p:nvSpPr>
         <p:spPr>
           <a:xfrm>
-            <a:off x="384048" y="868680"/>
-            <a:ext cx="3611880" cy="292608"/>
+            <a:off x="384048" y="804672"/>
+            <a:ext cx="2971800" cy="292608"/>
           </a:xfrm>
           <a:prstGeom prst="rect">
             <a:avLst/>
@@ -1011,8 +1011,8 @@
         </p:nvSpPr>
         <p:spPr>
           <a:xfrm>
-            <a:off x="475488" y="868680"/>
-            <a:ext cx="3429000" cy="292608"/>
+            <a:off x="466344" y="804672"/>
+            <a:ext cx="2807208" cy="292608"/>
           </a:xfrm>
           <a:prstGeom prst="rect">
             <a:avLst/>
@@ -1028,7 +1028,7 @@
               <a:buNone/>
             </a:pPr>
             <a:r>
-              <a:rPr lang="en-US" sz="1150" b="1" dirty="0">
+              <a:rPr lang="en-US" sz="1100" b="1" dirty="0">
                 <a:solidFill>
                   <a:srgbClr val="FFFFFF"/>
                 </a:solidFill>
@@ -1038,7 +1038,7 @@
               </a:rPr>
               <a:t>Upstream hosts · lanes = max connections</a:t>
             </a:r>
-            <a:endParaRPr lang="en-US" sz="1150" dirty="0"/>
+            <a:endParaRPr lang="en-US" sz="1100" dirty="0"/>
           </a:p>
         </p:txBody>
       </p:sp>
@@ -1050,8 +1050,8 @@
         </p:nvSpPr>
         <p:spPr>
           <a:xfrm>
-            <a:off x="4197096" y="1161288"/>
-            <a:ext cx="3840480" cy="4032504"/>
+            <a:off x="3557016" y="1097280"/>
+            <a:ext cx="4389120" cy="4114800"/>
           </a:xfrm>
           <a:prstGeom prst="rect">
             <a:avLst/>
@@ -1075,8 +1075,8 @@
         </p:nvSpPr>
         <p:spPr>
           <a:xfrm>
-            <a:off x="4197096" y="868680"/>
-            <a:ext cx="3840480" cy="292608"/>
+            <a:off x="3557016" y="804672"/>
+            <a:ext cx="4389120" cy="292608"/>
           </a:xfrm>
           <a:prstGeom prst="rect">
             <a:avLst/>
@@ -1100,8 +1100,8 @@
         </p:nvSpPr>
         <p:spPr>
           <a:xfrm>
-            <a:off x="4288536" y="868680"/>
-            <a:ext cx="3657600" cy="292608"/>
+            <a:off x="3639312" y="804672"/>
+            <a:ext cx="4224528" cy="292608"/>
           </a:xfrm>
           <a:prstGeom prst="rect">
             <a:avLst/>
@@ -1117,7 +1117,7 @@
               <a:buNone/>
             </a:pPr>
             <a:r>
-              <a:rPr lang="en-US" sz="1150" b="1" dirty="0">
+              <a:rPr lang="en-US" sz="1100" b="1" dirty="0">
                 <a:solidFill>
                   <a:srgbClr val="FFFFFF"/>
                 </a:solidFill>
@@ -1125,9 +1125,9 @@
                 <a:ea typeface="Calibri" pitchFamily="34" charset="-122"/>
                 <a:cs typeface="Calibri" pitchFamily="34" charset="-120"/>
               </a:rPr>
-              <a:t>The pipeline</a:t>
-            </a:r>
-            <a:endParaRPr lang="en-US" sz="1150" dirty="0"/>
+              <a:t>Two stages, both Beam</a:t>
+            </a:r>
+            <a:endParaRPr lang="en-US" sz="1100" dirty="0"/>
           </a:p>
         </p:txBody>
       </p:sp>
@@ -1139,8 +1139,8 @@
         </p:nvSpPr>
         <p:spPr>
           <a:xfrm>
-            <a:off x="8238744" y="1161288"/>
-            <a:ext cx="3566160" cy="4032504"/>
+            <a:off x="8147304" y="1097280"/>
+            <a:ext cx="3657600" cy="4114800"/>
           </a:xfrm>
           <a:prstGeom prst="rect">
             <a:avLst/>
@@ -1164,8 +1164,8 @@
         </p:nvSpPr>
         <p:spPr>
           <a:xfrm>
-            <a:off x="8238744" y="868680"/>
-            <a:ext cx="3566160" cy="292608"/>
+            <a:off x="8147304" y="804672"/>
+            <a:ext cx="3657600" cy="292608"/>
           </a:xfrm>
           <a:prstGeom prst="rect">
             <a:avLst/>
@@ -1189,8 +1189,8 @@
         </p:nvSpPr>
         <p:spPr>
           <a:xfrm>
-            <a:off x="8330184" y="868680"/>
-            <a:ext cx="3383280" cy="292608"/>
+            <a:off x="8229600" y="804672"/>
+            <a:ext cx="3493008" cy="292608"/>
           </a:xfrm>
           <a:prstGeom prst="rect">
             <a:avLst/>
@@ -1206,7 +1206,7 @@
               <a:buNone/>
             </a:pPr>
             <a:r>
-              <a:rPr lang="en-US" sz="1150" b="1" dirty="0">
+              <a:rPr lang="en-US" sz="1100" b="1" dirty="0">
                 <a:solidFill>
                   <a:srgbClr val="FFFFFF"/>
                 </a:solidFill>
@@ -1214,9 +1214,9 @@
                 <a:ea typeface="Calibri" pitchFamily="34" charset="-122"/>
                 <a:cs typeface="Calibri" pitchFamily="34" charset="-120"/>
               </a:rPr>
-              <a:t>Hub mirror · chfrank/earth-tensors/sources/</a:t>
-            </a:r>
-            <a:endParaRPr lang="en-US" sz="1150" dirty="0"/>
+              <a:t>Output · &lt;output&gt;/ (local dir or gs://)</a:t>
+            </a:r>
+            <a:endParaRPr lang="en-US" sz="1100" dirty="0"/>
           </a:p>
         </p:txBody>
       </p:sp>
@@ -1228,8 +1228,8 @@
         </p:nvSpPr>
         <p:spPr>
           <a:xfrm>
-            <a:off x="475488" y="1243584"/>
-            <a:ext cx="3429000" cy="383032"/>
+            <a:off x="475488" y="1170432"/>
+            <a:ext cx="2788920" cy="383032"/>
           </a:xfrm>
           <a:prstGeom prst="rect">
             <a:avLst/>
@@ -1242,6 +1242,9 @@
           <a:lstStyle/>
           <a:p>
             <a:pPr indent="0" marL="0">
+              <a:lnSpc>
+                <a:spcPct val="95000"/>
+              </a:lnSpc>
               <a:buNone/>
             </a:pPr>
             <a:r>
@@ -1267,12 +1270,12 @@
         </p:nvSpPr>
         <p:spPr>
           <a:xfrm>
-            <a:off x="475488" y="1718056"/>
-            <a:ext cx="713232" cy="237744"/>
+            <a:off x="475488" y="1635760"/>
+            <a:ext cx="658368" cy="228600"/>
           </a:xfrm>
           <a:prstGeom prst="roundRect">
             <a:avLst>
-              <a:gd name="adj" fmla="val 23077"/>
+              <a:gd name="adj" fmla="val 24000"/>
             </a:avLst>
           </a:prstGeom>
           <a:solidFill>
@@ -1294,8 +1297,8 @@
         </p:nvSpPr>
         <p:spPr>
           <a:xfrm>
-            <a:off x="475488" y="1718056"/>
-            <a:ext cx="713232" cy="237744"/>
+            <a:off x="475488" y="1635760"/>
+            <a:ext cx="658368" cy="228600"/>
           </a:xfrm>
           <a:prstGeom prst="rect">
             <a:avLst/>
@@ -1333,8 +1336,8 @@
         </p:nvSpPr>
         <p:spPr>
           <a:xfrm>
-            <a:off x="1289304" y="1708912"/>
-            <a:ext cx="2615184" cy="218948"/>
+            <a:off x="1225296" y="1626616"/>
+            <a:ext cx="2039112" cy="218948"/>
           </a:xfrm>
           <a:prstGeom prst="rect">
             <a:avLst/>
@@ -1378,7 +1381,7 @@
                 <a:ea typeface="Calibri" pitchFamily="34" charset="-122"/>
                 <a:cs typeface="Calibri" pitchFamily="34" charset="-120"/>
               </a:rPr>
-              <a:t>GLORYS12 · DUACS · statics</a:t>
+              <a:t>GLORYS12, DUACS, statics</a:t>
             </a:r>
             <a:endParaRPr lang="en-US" sz="1100" dirty="0"/>
           </a:p>
@@ -1392,8 +1395,8 @@
         </p:nvSpPr>
         <p:spPr>
           <a:xfrm>
-            <a:off x="475488" y="2007521"/>
-            <a:ext cx="3429000" cy="0"/>
+            <a:off x="475488" y="1934305"/>
+            <a:ext cx="2788920" cy="0"/>
           </a:xfrm>
           <a:prstGeom prst="line">
             <a:avLst/>
@@ -1415,12 +1418,12 @@
         </p:nvSpPr>
         <p:spPr>
           <a:xfrm>
-            <a:off x="475488" y="2040953"/>
-            <a:ext cx="713232" cy="237744"/>
+            <a:off x="475488" y="1985963"/>
+            <a:ext cx="658368" cy="228600"/>
           </a:xfrm>
           <a:prstGeom prst="roundRect">
             <a:avLst>
-              <a:gd name="adj" fmla="val 23077"/>
+              <a:gd name="adj" fmla="val 24000"/>
             </a:avLst>
           </a:prstGeom>
           <a:solidFill>
@@ -1442,8 +1445,8 @@
         </p:nvSpPr>
         <p:spPr>
           <a:xfrm>
-            <a:off x="475488" y="2040953"/>
-            <a:ext cx="713232" cy="237744"/>
+            <a:off x="475488" y="1985963"/>
+            <a:ext cx="658368" cy="228600"/>
           </a:xfrm>
           <a:prstGeom prst="rect">
             <a:avLst/>
@@ -1481,8 +1484,8 @@
         </p:nvSpPr>
         <p:spPr>
           <a:xfrm>
-            <a:off x="1289304" y="2031809"/>
-            <a:ext cx="2615184" cy="218948"/>
+            <a:off x="1225296" y="1976819"/>
+            <a:ext cx="2039112" cy="218948"/>
           </a:xfrm>
           <a:prstGeom prst="rect">
             <a:avLst/>
@@ -1526,7 +1529,7 @@
                 <a:ea typeface="Calibri" pitchFamily="34" charset="-122"/>
                 <a:cs typeface="Calibri" pitchFamily="34" charset="-120"/>
               </a:rPr>
-              <a:t>OISST per-day files (sst + ice)</a:t>
+              <a:t>OISST per-day (sst+ice)</a:t>
             </a:r>
             <a:endParaRPr lang="en-US" sz="1100" dirty="0"/>
           </a:p>
@@ -1540,8 +1543,8 @@
         </p:nvSpPr>
         <p:spPr>
           <a:xfrm>
-            <a:off x="475488" y="2330418"/>
-            <a:ext cx="3429000" cy="0"/>
+            <a:off x="475488" y="2284508"/>
+            <a:ext cx="2788920" cy="0"/>
           </a:xfrm>
           <a:prstGeom prst="line">
             <a:avLst/>
@@ -1563,12 +1566,12 @@
         </p:nvSpPr>
         <p:spPr>
           <a:xfrm>
-            <a:off x="475488" y="2363851"/>
-            <a:ext cx="713232" cy="237744"/>
+            <a:off x="475488" y="2336165"/>
+            <a:ext cx="658368" cy="228600"/>
           </a:xfrm>
           <a:prstGeom prst="roundRect">
             <a:avLst>
-              <a:gd name="adj" fmla="val 23077"/>
+              <a:gd name="adj" fmla="val 24000"/>
             </a:avLst>
           </a:prstGeom>
           <a:solidFill>
@@ -1590,8 +1593,8 @@
         </p:nvSpPr>
         <p:spPr>
           <a:xfrm>
-            <a:off x="475488" y="2363851"/>
-            <a:ext cx="713232" cy="237744"/>
+            <a:off x="475488" y="2336165"/>
+            <a:ext cx="658368" cy="228600"/>
           </a:xfrm>
           <a:prstGeom prst="rect">
             <a:avLst/>
@@ -1629,8 +1632,8 @@
         </p:nvSpPr>
         <p:spPr>
           <a:xfrm>
-            <a:off x="1289304" y="2354707"/>
-            <a:ext cx="2615184" cy="218948"/>
+            <a:off x="1225296" y="2327021"/>
+            <a:ext cx="2039112" cy="218948"/>
           </a:xfrm>
           <a:prstGeom prst="rect">
             <a:avLst/>
@@ -1688,8 +1691,8 @@
         </p:nvSpPr>
         <p:spPr>
           <a:xfrm>
-            <a:off x="1289304" y="2555367"/>
-            <a:ext cx="2615184" cy="364744"/>
+            <a:off x="1225296" y="2527681"/>
+            <a:ext cx="2039112" cy="364744"/>
           </a:xfrm>
           <a:prstGeom prst="rect">
             <a:avLst/>
@@ -1730,8 +1733,8 @@
         </p:nvSpPr>
         <p:spPr>
           <a:xfrm>
-            <a:off x="475488" y="2962688"/>
-            <a:ext cx="3429000" cy="0"/>
+            <a:off x="475488" y="2953226"/>
+            <a:ext cx="2788920" cy="0"/>
           </a:xfrm>
           <a:prstGeom prst="line">
             <a:avLst/>
@@ -1753,12 +1756,12 @@
         </p:nvSpPr>
         <p:spPr>
           <a:xfrm>
-            <a:off x="475488" y="2996121"/>
-            <a:ext cx="713232" cy="237744"/>
+            <a:off x="475488" y="3004884"/>
+            <a:ext cx="658368" cy="228600"/>
           </a:xfrm>
           <a:prstGeom prst="roundRect">
             <a:avLst>
-              <a:gd name="adj" fmla="val 23077"/>
+              <a:gd name="adj" fmla="val 24000"/>
             </a:avLst>
           </a:prstGeom>
           <a:solidFill>
@@ -1780,8 +1783,8 @@
         </p:nvSpPr>
         <p:spPr>
           <a:xfrm>
-            <a:off x="475488" y="2996121"/>
-            <a:ext cx="713232" cy="237744"/>
+            <a:off x="475488" y="3004884"/>
+            <a:ext cx="658368" cy="228600"/>
           </a:xfrm>
           <a:prstGeom prst="rect">
             <a:avLst/>
@@ -1819,8 +1822,8 @@
         </p:nvSpPr>
         <p:spPr>
           <a:xfrm>
-            <a:off x="1289304" y="2986977"/>
-            <a:ext cx="2615184" cy="218948"/>
+            <a:off x="1225296" y="2995740"/>
+            <a:ext cx="2039112" cy="218948"/>
           </a:xfrm>
           <a:prstGeom prst="rect">
             <a:avLst/>
@@ -1878,8 +1881,8 @@
         </p:nvSpPr>
         <p:spPr>
           <a:xfrm>
-            <a:off x="475488" y="3285585"/>
-            <a:ext cx="3429000" cy="0"/>
+            <a:off x="475488" y="3303429"/>
+            <a:ext cx="2788920" cy="0"/>
           </a:xfrm>
           <a:prstGeom prst="line">
             <a:avLst/>
@@ -1901,12 +1904,12 @@
         </p:nvSpPr>
         <p:spPr>
           <a:xfrm>
-            <a:off x="475488" y="3319018"/>
-            <a:ext cx="713232" cy="237744"/>
+            <a:off x="475488" y="3355086"/>
+            <a:ext cx="658368" cy="228600"/>
           </a:xfrm>
           <a:prstGeom prst="roundRect">
             <a:avLst>
-              <a:gd name="adj" fmla="val 23077"/>
+              <a:gd name="adj" fmla="val 24000"/>
             </a:avLst>
           </a:prstGeom>
           <a:solidFill>
@@ -1928,8 +1931,8 @@
         </p:nvSpPr>
         <p:spPr>
           <a:xfrm>
-            <a:off x="475488" y="3319018"/>
-            <a:ext cx="713232" cy="237744"/>
+            <a:off x="475488" y="3355086"/>
+            <a:ext cx="658368" cy="228600"/>
           </a:xfrm>
           <a:prstGeom prst="rect">
             <a:avLst/>
@@ -1967,8 +1970,8 @@
         </p:nvSpPr>
         <p:spPr>
           <a:xfrm>
-            <a:off x="1289304" y="3309874"/>
-            <a:ext cx="2615184" cy="392176"/>
+            <a:off x="1225296" y="3345942"/>
+            <a:ext cx="2039112" cy="392176"/>
           </a:xfrm>
           <a:prstGeom prst="rect">
             <a:avLst/>
@@ -2026,8 +2029,8 @@
         </p:nvSpPr>
         <p:spPr>
           <a:xfrm>
-            <a:off x="475488" y="3726339"/>
-            <a:ext cx="3429000" cy="0"/>
+            <a:off x="475488" y="3780631"/>
+            <a:ext cx="2788920" cy="0"/>
           </a:xfrm>
           <a:prstGeom prst="line">
             <a:avLst/>
@@ -2049,12 +2052,12 @@
         </p:nvSpPr>
         <p:spPr>
           <a:xfrm>
-            <a:off x="475488" y="3759771"/>
-            <a:ext cx="713232" cy="237744"/>
+            <a:off x="475488" y="3832289"/>
+            <a:ext cx="658368" cy="228600"/>
           </a:xfrm>
           <a:prstGeom prst="roundRect">
             <a:avLst>
-              <a:gd name="adj" fmla="val 23077"/>
+              <a:gd name="adj" fmla="val 24000"/>
             </a:avLst>
           </a:prstGeom>
           <a:solidFill>
@@ -2076,8 +2079,8 @@
         </p:nvSpPr>
         <p:spPr>
           <a:xfrm>
-            <a:off x="475488" y="3759771"/>
-            <a:ext cx="713232" cy="237744"/>
+            <a:off x="475488" y="3832289"/>
+            <a:ext cx="658368" cy="228600"/>
           </a:xfrm>
           <a:prstGeom prst="rect">
             <a:avLst/>
@@ -2115,8 +2118,8 @@
         </p:nvSpPr>
         <p:spPr>
           <a:xfrm>
-            <a:off x="1289304" y="3750627"/>
-            <a:ext cx="2615184" cy="218948"/>
+            <a:off x="1225296" y="3823145"/>
+            <a:ext cx="2039112" cy="218948"/>
           </a:xfrm>
           <a:prstGeom prst="rect">
             <a:avLst/>
@@ -2160,7 +2163,7 @@
                 <a:ea typeface="Calibri" pitchFamily="34" charset="-122"/>
                 <a:cs typeface="Calibri" pitchFamily="34" charset="-120"/>
               </a:rPr>
-              <a:t>Natural Earth statics</a:t>
+              <a:t>Natural Earth</a:t>
             </a:r>
             <a:endParaRPr lang="en-US" sz="1100" dirty="0"/>
           </a:p>
@@ -2174,8 +2177,8 @@
         </p:nvSpPr>
         <p:spPr>
           <a:xfrm>
-            <a:off x="475488" y="4049236"/>
-            <a:ext cx="3429000" cy="0"/>
+            <a:off x="475488" y="4130834"/>
+            <a:ext cx="2788920" cy="0"/>
           </a:xfrm>
           <a:prstGeom prst="line">
             <a:avLst/>
@@ -2197,12 +2200,12 @@
         </p:nvSpPr>
         <p:spPr>
           <a:xfrm>
-            <a:off x="475488" y="4082669"/>
-            <a:ext cx="713232" cy="237744"/>
+            <a:off x="475488" y="4182491"/>
+            <a:ext cx="658368" cy="228600"/>
           </a:xfrm>
           <a:prstGeom prst="roundRect">
             <a:avLst>
-              <a:gd name="adj" fmla="val 23077"/>
+              <a:gd name="adj" fmla="val 24000"/>
             </a:avLst>
           </a:prstGeom>
           <a:solidFill>
@@ -2224,8 +2227,8 @@
         </p:nvSpPr>
         <p:spPr>
           <a:xfrm>
-            <a:off x="475488" y="4082669"/>
-            <a:ext cx="713232" cy="237744"/>
+            <a:off x="475488" y="4182491"/>
+            <a:ext cx="658368" cy="228600"/>
           </a:xfrm>
           <a:prstGeom prst="rect">
             <a:avLst/>
@@ -2263,8 +2266,8 @@
         </p:nvSpPr>
         <p:spPr>
           <a:xfrm>
-            <a:off x="1289304" y="4073525"/>
-            <a:ext cx="2615184" cy="218948"/>
+            <a:off x="1225296" y="4173347"/>
+            <a:ext cx="2039112" cy="218948"/>
           </a:xfrm>
           <a:prstGeom prst="rect">
             <a:avLst/>
@@ -2308,7 +2311,7 @@
                 <a:ea typeface="Calibri" pitchFamily="34" charset="-122"/>
                 <a:cs typeface="Calibri" pitchFamily="34" charset="-120"/>
               </a:rPr>
-              <a:t>ERA5 — gated on the free account</a:t>
+              <a:t>ERA5 (free account)</a:t>
             </a:r>
             <a:endParaRPr lang="en-US" sz="1100" dirty="0"/>
           </a:p>
@@ -2322,8 +2325,8 @@
         </p:nvSpPr>
         <p:spPr>
           <a:xfrm>
-            <a:off x="475488" y="4372134"/>
-            <a:ext cx="3429000" cy="0"/>
+            <a:off x="475488" y="4481036"/>
+            <a:ext cx="2788920" cy="0"/>
           </a:xfrm>
           <a:prstGeom prst="line">
             <a:avLst/>
@@ -2345,12 +2348,12 @@
         </p:nvSpPr>
         <p:spPr>
           <a:xfrm>
-            <a:off x="475488" y="4405566"/>
-            <a:ext cx="713232" cy="237744"/>
+            <a:off x="475488" y="4532694"/>
+            <a:ext cx="658368" cy="228600"/>
           </a:xfrm>
           <a:prstGeom prst="roundRect">
             <a:avLst>
-              <a:gd name="adj" fmla="val 23077"/>
+              <a:gd name="adj" fmla="val 24000"/>
             </a:avLst>
           </a:prstGeom>
           <a:solidFill>
@@ -2372,8 +2375,8 @@
         </p:nvSpPr>
         <p:spPr>
           <a:xfrm>
-            <a:off x="475488" y="4405566"/>
-            <a:ext cx="713232" cy="237744"/>
+            <a:off x="475488" y="4532694"/>
+            <a:ext cx="658368" cy="228600"/>
           </a:xfrm>
           <a:prstGeom prst="rect">
             <a:avLst/>
@@ -2411,8 +2414,8 @@
         </p:nvSpPr>
         <p:spPr>
           <a:xfrm>
-            <a:off x="1289304" y="4396422"/>
-            <a:ext cx="2615184" cy="218948"/>
+            <a:off x="1225296" y="4523550"/>
+            <a:ext cx="2039112" cy="218948"/>
           </a:xfrm>
           <a:prstGeom prst="rect">
             <a:avLst/>
@@ -2456,7 +2459,7 @@
                 <a:ea typeface="Calibri" pitchFamily="34" charset="-122"/>
                 <a:cs typeface="Calibri" pitchFamily="34" charset="-120"/>
               </a:rPr>
-              <a:t>CCI soil moisture — registration</a:t>
+              <a:t>CCI soil moisture</a:t>
             </a:r>
             <a:endParaRPr lang="en-US" sz="1100" dirty="0"/>
           </a:p>
@@ -2470,8 +2473,8 @@
         </p:nvSpPr>
         <p:spPr>
           <a:xfrm>
-            <a:off x="475488" y="4695031"/>
-            <a:ext cx="3429000" cy="0"/>
+            <a:off x="475488" y="4831239"/>
+            <a:ext cx="2788920" cy="0"/>
           </a:xfrm>
           <a:prstGeom prst="line">
             <a:avLst/>
@@ -2493,12 +2496,12 @@
         </p:nvSpPr>
         <p:spPr>
           <a:xfrm>
-            <a:off x="475488" y="4728464"/>
-            <a:ext cx="713232" cy="237744"/>
+            <a:off x="475488" y="4882896"/>
+            <a:ext cx="658368" cy="228600"/>
           </a:xfrm>
           <a:prstGeom prst="roundRect">
             <a:avLst>
-              <a:gd name="adj" fmla="val 23077"/>
+              <a:gd name="adj" fmla="val 24000"/>
             </a:avLst>
           </a:prstGeom>
           <a:solidFill>
@@ -2520,8 +2523,8 @@
         </p:nvSpPr>
         <p:spPr>
           <a:xfrm>
-            <a:off x="475488" y="4728464"/>
-            <a:ext cx="713232" cy="237744"/>
+            <a:off x="475488" y="4882896"/>
+            <a:ext cx="658368" cy="228600"/>
           </a:xfrm>
           <a:prstGeom prst="rect">
             <a:avLst/>
@@ -2545,7 +2548,7 @@
                 <a:ea typeface="Calibri" pitchFamily="34" charset="-122"/>
                 <a:cs typeface="Calibri" pitchFamily="34" charset="-120"/>
               </a:rPr>
-              <a:t>≤ 60/h</a:t>
+              <a:t>2 · 1 s</a:t>
             </a:r>
             <a:endParaRPr lang="en-US" sz="1100" dirty="0"/>
           </a:p>
@@ -2559,8 +2562,8 @@
         </p:nvSpPr>
         <p:spPr>
           <a:xfrm>
-            <a:off x="1289304" y="4719320"/>
-            <a:ext cx="2615184" cy="392176"/>
+            <a:off x="1225296" y="4873752"/>
+            <a:ext cx="2039112" cy="218948"/>
           </a:xfrm>
           <a:prstGeom prst="rect">
             <a:avLst/>
@@ -2587,7 +2590,7 @@
                 <a:ea typeface="Calibri" pitchFamily="34" charset="-122"/>
                 <a:cs typeface="Calibri" pitchFamily="34" charset="-120"/>
               </a:rPr>
-              <a:t>huggingface </a:t>
+              <a:t>hf_public </a:t>
             </a:r>
             <a:pPr indent="0" marL="0">
               <a:lnSpc>
@@ -2604,7 +2607,7 @@
                 <a:ea typeface="Calibri" pitchFamily="34" charset="-122"/>
                 <a:cs typeface="Calibri" pitchFamily="34" charset="-120"/>
               </a:rPr>
-              <a:t>publish · batched commits, restore-verified</a:t>
+              <a:t>GLORYS mirror (opt.)</a:t>
             </a:r>
             <a:endParaRPr lang="en-US" sz="1100" dirty="0"/>
           </a:p>
@@ -2612,14 +2615,53 @@
       </p:sp>
       <p:sp>
         <p:nvSpPr>
-          <p:cNvPr id="50" name="Shape 48"/>
+          <p:cNvPr id="50" name="Text 48"/>
+          <p:cNvSpPr txBox="1"/>
+          <p:nvPr/>
+        </p:nvSpPr>
+        <p:spPr>
+          <a:xfrm>
+            <a:off x="3648456" y="1179576"/>
+            <a:ext cx="4206240" cy="182880"/>
+          </a:xfrm>
+          <a:prstGeom prst="rect">
+            <a:avLst/>
+          </a:prstGeom>
+          <a:noFill/>
+          <a:ln/>
+        </p:spPr>
+        <p:txBody>
+          <a:bodyPr wrap="square" lIns="0" tIns="0" rIns="0" bIns="0" rtlCol="0" anchor="ctr"/>
+          <a:lstStyle/>
+          <a:p>
+            <a:pPr indent="0" marL="0">
+              <a:buNone/>
+            </a:pPr>
+            <a:r>
+              <a:rPr lang="en-US" sz="1100" b="1" spc="60" kern="0" dirty="0">
+                <a:solidFill>
+                  <a:srgbClr val="01606B"/>
+                </a:solidFill>
+                <a:latin typeface="Calibri" pitchFamily="34" charset="0"/>
+                <a:ea typeface="Calibri" pitchFamily="34" charset="-122"/>
+                <a:cs typeface="Calibri" pitchFamily="34" charset="-120"/>
+              </a:rPr>
+              <a:t>STAGE A · import</a:t>
+            </a:r>
+            <a:endParaRPr lang="en-US" sz="1100" dirty="0"/>
+          </a:p>
+        </p:txBody>
+      </p:sp>
+      <p:sp>
+        <p:nvSpPr>
+          <p:cNvPr id="51" name="Shape 49"/>
           <p:cNvSpPr/>
           <p:nvPr/>
         </p:nvSpPr>
         <p:spPr>
           <a:xfrm>
-            <a:off x="4288536" y="1252728"/>
-            <a:ext cx="3657600" cy="264668"/>
+            <a:off x="3648456" y="1362456"/>
+            <a:ext cx="4206240" cy="401320"/>
           </a:xfrm>
           <a:prstGeom prst="rect">
             <a:avLst/>
@@ -2637,14 +2679,14 @@
       </p:sp>
       <p:sp>
         <p:nvSpPr>
-          <p:cNvPr id="51" name="Text 49"/>
-          <p:cNvSpPr txBox="1"/>
-          <p:nvPr/>
-        </p:nvSpPr>
-        <p:spPr>
-          <a:xfrm>
-            <a:off x="4370832" y="1252728"/>
-            <a:ext cx="3493008" cy="264668"/>
+          <p:cNvPr id="52" name="Text 50"/>
+          <p:cNvSpPr txBox="1"/>
+          <p:nvPr/>
+        </p:nvSpPr>
+        <p:spPr>
+          <a:xfrm>
+            <a:off x="3730752" y="1362456"/>
+            <a:ext cx="4041648" cy="401320"/>
           </a:xfrm>
           <a:prstGeom prst="rect">
             <a:avLst/>
@@ -2671,7 +2713,7 @@
                 <a:ea typeface="Calibri" pitchFamily="34" charset="-122"/>
                 <a:cs typeface="Calibri" pitchFamily="34" charset="-120"/>
               </a:rPr>
-              <a:t>sources.yaml — the registry</a:t>
+              <a:t>sources.yaml registry → manifest of work items → skip shards already DONE</a:t>
             </a:r>
             <a:endParaRPr lang="en-US" sz="1100" dirty="0"/>
           </a:p>
@@ -2679,14 +2721,14 @@
       </p:sp>
       <p:sp>
         <p:nvSpPr>
-          <p:cNvPr id="52" name="Shape 50"/>
+          <p:cNvPr id="53" name="Shape 51"/>
           <p:cNvSpPr/>
           <p:nvPr/>
         </p:nvSpPr>
         <p:spPr>
           <a:xfrm>
-            <a:off x="6048756" y="1548359"/>
-            <a:ext cx="137160" cy="109728"/>
+            <a:off x="5687568" y="1778279"/>
+            <a:ext cx="128016" cy="91440"/>
           </a:xfrm>
           <a:prstGeom prst="downArrow">
             <a:avLst/>
@@ -2704,20 +2746,1239 @@
       </p:sp>
       <p:sp>
         <p:nvSpPr>
-          <p:cNvPr id="53" name="Shape 51"/>
+          <p:cNvPr id="54" name="Shape 52"/>
           <p:cNvSpPr/>
           <p:nvPr/>
         </p:nvSpPr>
         <p:spPr>
           <a:xfrm>
-            <a:off x="4288536" y="1689049"/>
-            <a:ext cx="3657600" cy="264668"/>
+            <a:off x="3648456" y="1884223"/>
+            <a:ext cx="4206240" cy="228092"/>
+          </a:xfrm>
+          <a:prstGeom prst="rect">
+            <a:avLst/>
+          </a:prstGeom>
+          <a:solidFill>
+            <a:srgbClr val="F3F8F9"/>
+          </a:solidFill>
+          <a:ln w="9525">
+            <a:solidFill>
+              <a:srgbClr val="E4EBEC"/>
+            </a:solidFill>
+            <a:prstDash val="solid"/>
+          </a:ln>
+        </p:spPr>
+      </p:sp>
+      <p:sp>
+        <p:nvSpPr>
+          <p:cNvPr id="55" name="Text 53"/>
+          <p:cNvSpPr txBox="1"/>
+          <p:nvPr/>
+        </p:nvSpPr>
+        <p:spPr>
+          <a:xfrm>
+            <a:off x="3730752" y="1884223"/>
+            <a:ext cx="4041648" cy="228092"/>
+          </a:xfrm>
+          <a:prstGeom prst="rect">
+            <a:avLst/>
+          </a:prstGeom>
+          <a:noFill/>
+          <a:ln/>
+        </p:spPr>
+        <p:txBody>
+          <a:bodyPr wrap="square" lIns="0" tIns="0" rIns="0" bIns="0" rtlCol="0" anchor="ctr"/>
+          <a:lstStyle/>
+          <a:p>
+            <a:pPr indent="0" marL="0">
+              <a:lnSpc>
+                <a:spcPct val="95000"/>
+              </a:lnSpc>
+              <a:buNone/>
+            </a:pPr>
+            <a:r>
+              <a:rPr lang="en-US" sz="1100" dirty="0">
+                <a:solidFill>
+                  <a:srgbClr val="18262B"/>
+                </a:solidFill>
+                <a:latin typeface="Calibri" pitchFamily="34" charset="0"/>
+                <a:ea typeface="Calibri" pitchFamily="34" charset="-122"/>
+                <a:cs typeface="Calibri" pitchFamily="34" charset="-120"/>
+              </a:rPr>
+              <a:t>key by (host, lane) · GroupByKey</a:t>
+            </a:r>
+            <a:endParaRPr lang="en-US" sz="1100" dirty="0"/>
+          </a:p>
+        </p:txBody>
+      </p:sp>
+      <p:sp>
+        <p:nvSpPr>
+          <p:cNvPr id="56" name="Shape 54"/>
+          <p:cNvSpPr/>
+          <p:nvPr/>
+        </p:nvSpPr>
+        <p:spPr>
+          <a:xfrm>
+            <a:off x="5687568" y="2126818"/>
+            <a:ext cx="128016" cy="91440"/>
+          </a:xfrm>
+          <a:prstGeom prst="downArrow">
+            <a:avLst/>
+          </a:prstGeom>
+          <a:solidFill>
+            <a:srgbClr val="028090"/>
+          </a:solidFill>
+          <a:ln w="6350">
+            <a:solidFill>
+              <a:srgbClr val="028090"/>
+            </a:solidFill>
+            <a:prstDash val="solid"/>
+          </a:ln>
+        </p:spPr>
+      </p:sp>
+      <p:sp>
+        <p:nvSpPr>
+          <p:cNvPr id="57" name="Shape 55"/>
+          <p:cNvSpPr/>
+          <p:nvPr/>
+        </p:nvSpPr>
+        <p:spPr>
+          <a:xfrm>
+            <a:off x="3648456" y="2232762"/>
+            <a:ext cx="4206240" cy="883666"/>
           </a:xfrm>
           <a:prstGeom prst="rect">
             <a:avLst/>
           </a:prstGeom>
           <a:solidFill>
             <a:srgbClr val="FFFFFF"/>
+          </a:solidFill>
+          <a:ln w="13970">
+            <a:solidFill>
+              <a:srgbClr val="028090"/>
+            </a:solidFill>
+            <a:prstDash val="solid"/>
+          </a:ln>
+        </p:spPr>
+      </p:sp>
+      <p:sp>
+        <p:nvSpPr>
+          <p:cNvPr id="58" name="Text 56"/>
+          <p:cNvSpPr txBox="1"/>
+          <p:nvPr/>
+        </p:nvSpPr>
+        <p:spPr>
+          <a:xfrm>
+            <a:off x="3730752" y="2278482"/>
+            <a:ext cx="4041648" cy="217678"/>
+          </a:xfrm>
+          <a:prstGeom prst="rect">
+            <a:avLst/>
+          </a:prstGeom>
+          <a:noFill/>
+          <a:ln/>
+        </p:spPr>
+        <p:txBody>
+          <a:bodyPr wrap="square" lIns="0" tIns="0" rIns="0" bIns="0" rtlCol="0" anchor="t"/>
+          <a:lstStyle/>
+          <a:p>
+            <a:pPr indent="0" marL="0">
+              <a:buNone/>
+            </a:pPr>
+            <a:r>
+              <a:rPr lang="en-US" sz="1150" b="1" dirty="0">
+                <a:solidFill>
+                  <a:srgbClr val="01606B"/>
+                </a:solidFill>
+                <a:latin typeface="Calibri" pitchFamily="34" charset="0"/>
+                <a:ea typeface="Calibri" pitchFamily="34" charset="-122"/>
+                <a:cs typeface="Calibri" pitchFamily="34" charset="-120"/>
+              </a:rPr>
+              <a:t>LaneWorker</a:t>
+            </a:r>
+            <a:endParaRPr lang="en-US" sz="1150" dirty="0"/>
+          </a:p>
+        </p:txBody>
+      </p:sp>
+      <p:sp>
+        <p:nvSpPr>
+          <p:cNvPr id="59" name="Text 57"/>
+          <p:cNvSpPr txBox="1"/>
+          <p:nvPr/>
+        </p:nvSpPr>
+        <p:spPr>
+          <a:xfrm>
+            <a:off x="3794760" y="2496160"/>
+            <a:ext cx="3913632" cy="191516"/>
+          </a:xfrm>
+          <a:prstGeom prst="rect">
+            <a:avLst/>
+          </a:prstGeom>
+          <a:noFill/>
+          <a:ln/>
+        </p:spPr>
+        <p:txBody>
+          <a:bodyPr wrap="square" lIns="0" tIns="0" rIns="0" bIns="0" rtlCol="0" anchor="t"/>
+          <a:lstStyle/>
+          <a:p>
+            <a:pPr indent="0" marL="0">
+              <a:lnSpc>
+                <a:spcPct val="95000"/>
+              </a:lnSpc>
+              <a:buNone/>
+            </a:pPr>
+            <a:r>
+              <a:rPr lang="en-US" sz="1100" dirty="0">
+                <a:solidFill>
+                  <a:srgbClr val="18262B"/>
+                </a:solidFill>
+                <a:latin typeface="Calibri" pitchFamily="34" charset="0"/>
+                <a:ea typeface="Calibri" pitchFamily="34" charset="-122"/>
+                <a:cs typeface="Calibri" pitchFamily="34" charset="-120"/>
+              </a:rPr>
+              <a:t>pace · fetch · bin 0.25° (aggregate_cadence, imported)</a:t>
+            </a:r>
+            <a:endParaRPr lang="en-US" sz="1100" dirty="0"/>
+          </a:p>
+        </p:txBody>
+      </p:sp>
+      <p:sp>
+        <p:nvSpPr>
+          <p:cNvPr id="60" name="Text 58"/>
+          <p:cNvSpPr txBox="1"/>
+          <p:nvPr/>
+        </p:nvSpPr>
+        <p:spPr>
+          <a:xfrm>
+            <a:off x="3794760" y="2687676"/>
+            <a:ext cx="3913632" cy="191516"/>
+          </a:xfrm>
+          <a:prstGeom prst="rect">
+            <a:avLst/>
+          </a:prstGeom>
+          <a:noFill/>
+          <a:ln/>
+        </p:spPr>
+        <p:txBody>
+          <a:bodyPr wrap="square" lIns="0" tIns="0" rIns="0" bIns="0" rtlCol="0" anchor="t"/>
+          <a:lstStyle/>
+          <a:p>
+            <a:pPr indent="0" marL="0">
+              <a:lnSpc>
+                <a:spcPct val="95000"/>
+              </a:lnSpc>
+              <a:buNone/>
+            </a:pPr>
+            <a:r>
+              <a:rPr lang="en-US" sz="1100" dirty="0">
+                <a:solidFill>
+                  <a:srgbClr val="18262B"/>
+                </a:solidFill>
+                <a:latin typeface="Calibri" pitchFamily="34" charset="0"/>
+                <a:ea typeface="Calibri" pitchFamily="34" charset="-122"/>
+                <a:cs typeface="Calibri" pitchFamily="34" charset="-120"/>
+              </a:rPr>
+              <a:t>write shard → read back (CRC + sha256 per record)</a:t>
+            </a:r>
+            <a:endParaRPr lang="en-US" sz="1100" dirty="0"/>
+          </a:p>
+        </p:txBody>
+      </p:sp>
+      <p:sp>
+        <p:nvSpPr>
+          <p:cNvPr id="61" name="Text 59"/>
+          <p:cNvSpPr txBox="1"/>
+          <p:nvPr/>
+        </p:nvSpPr>
+        <p:spPr>
+          <a:xfrm>
+            <a:off x="3794760" y="2879192"/>
+            <a:ext cx="3913632" cy="191516"/>
+          </a:xfrm>
+          <a:prstGeom prst="rect">
+            <a:avLst/>
+          </a:prstGeom>
+          <a:noFill/>
+          <a:ln/>
+        </p:spPr>
+        <p:txBody>
+          <a:bodyPr wrap="square" lIns="0" tIns="0" rIns="0" bIns="0" rtlCol="0" anchor="t"/>
+          <a:lstStyle/>
+          <a:p>
+            <a:pPr indent="0" marL="0">
+              <a:lnSpc>
+                <a:spcPct val="95000"/>
+              </a:lnSpc>
+              <a:buNone/>
+            </a:pPr>
+            <a:r>
+              <a:rPr lang="en-US" sz="1100" dirty="0">
+                <a:solidFill>
+                  <a:srgbClr val="18262B"/>
+                </a:solidFill>
+                <a:latin typeface="Calibri" pitchFamily="34" charset="0"/>
+                <a:ea typeface="Calibri" pitchFamily="34" charset="-122"/>
+                <a:cs typeface="Calibri" pitchFamily="34" charset="-120"/>
+              </a:rPr>
+              <a:t>.done marker → delete the raw download</a:t>
+            </a:r>
+            <a:endParaRPr lang="en-US" sz="1100" dirty="0"/>
+          </a:p>
+        </p:txBody>
+      </p:sp>
+      <p:sp>
+        <p:nvSpPr>
+          <p:cNvPr id="62" name="Shape 60"/>
+          <p:cNvSpPr/>
+          <p:nvPr/>
+        </p:nvSpPr>
+        <p:spPr>
+          <a:xfrm>
+            <a:off x="3648456" y="3116428"/>
+            <a:ext cx="4206240" cy="410464"/>
+          </a:xfrm>
+          <a:prstGeom prst="rect">
+            <a:avLst/>
+          </a:prstGeom>
+          <a:solidFill>
+            <a:srgbClr val="E7F3F4"/>
+          </a:solidFill>
+          <a:ln w="6350">
+            <a:solidFill>
+              <a:srgbClr val="E7F3F4"/>
+            </a:solidFill>
+            <a:prstDash val="solid"/>
+          </a:ln>
+        </p:spPr>
+      </p:sp>
+      <p:sp>
+        <p:nvSpPr>
+          <p:cNvPr id="63" name="Text 61"/>
+          <p:cNvSpPr txBox="1"/>
+          <p:nvPr/>
+        </p:nvSpPr>
+        <p:spPr>
+          <a:xfrm>
+            <a:off x="3730752" y="3116428"/>
+            <a:ext cx="4041648" cy="410464"/>
+          </a:xfrm>
+          <a:prstGeom prst="rect">
+            <a:avLst/>
+          </a:prstGeom>
+          <a:noFill/>
+          <a:ln/>
+        </p:spPr>
+        <p:txBody>
+          <a:bodyPr wrap="square" lIns="0" tIns="0" rIns="0" bIns="0" rtlCol="0" anchor="ctr"/>
+          <a:lstStyle/>
+          <a:p>
+            <a:pPr indent="0" marL="0">
+              <a:lnSpc>
+                <a:spcPct val="95000"/>
+              </a:lnSpc>
+              <a:buNone/>
+            </a:pPr>
+            <a:r>
+              <a:rPr lang="en-US" sz="1100" i="1" dirty="0">
+                <a:solidFill>
+                  <a:srgbClr val="01606B"/>
+                </a:solidFill>
+                <a:latin typeface="Calibri" pitchFamily="34" charset="0"/>
+                <a:ea typeface="Calibri" pitchFamily="34" charset="-122"/>
+                <a:cs typeface="Calibri" pitchFamily="34" charset="-120"/>
+              </a:rPr>
+              <a:t>one key = one sequential polite stream; connections ≤ lanes on any runner — the same guarantee in Flume</a:t>
+            </a:r>
+            <a:endParaRPr lang="en-US" sz="1100" dirty="0"/>
+          </a:p>
+        </p:txBody>
+      </p:sp>
+      <p:sp>
+        <p:nvSpPr>
+          <p:cNvPr id="64" name="Shape 62"/>
+          <p:cNvSpPr/>
+          <p:nvPr/>
+        </p:nvSpPr>
+        <p:spPr>
+          <a:xfrm>
+            <a:off x="5687568" y="3541395"/>
+            <a:ext cx="128016" cy="91440"/>
+          </a:xfrm>
+          <a:prstGeom prst="downArrow">
+            <a:avLst/>
+          </a:prstGeom>
+          <a:solidFill>
+            <a:srgbClr val="028090"/>
+          </a:solidFill>
+          <a:ln w="6350">
+            <a:solidFill>
+              <a:srgbClr val="028090"/>
+            </a:solidFill>
+            <a:prstDash val="solid"/>
+          </a:ln>
+        </p:spPr>
+      </p:sp>
+      <p:sp>
+        <p:nvSpPr>
+          <p:cNvPr id="65" name="Shape 63"/>
+          <p:cNvSpPr/>
+          <p:nvPr/>
+        </p:nvSpPr>
+        <p:spPr>
+          <a:xfrm>
+            <a:off x="3648456" y="3647338"/>
+            <a:ext cx="4206240" cy="228092"/>
+          </a:xfrm>
+          <a:prstGeom prst="rect">
+            <a:avLst/>
+          </a:prstGeom>
+          <a:solidFill>
+            <a:srgbClr val="F3F8F9"/>
+          </a:solidFill>
+          <a:ln w="9525">
+            <a:solidFill>
+              <a:srgbClr val="E4EBEC"/>
+            </a:solidFill>
+            <a:prstDash val="solid"/>
+          </a:ln>
+        </p:spPr>
+      </p:sp>
+      <p:sp>
+        <p:nvSpPr>
+          <p:cNvPr id="66" name="Text 64"/>
+          <p:cNvSpPr txBox="1"/>
+          <p:nvPr/>
+        </p:nvSpPr>
+        <p:spPr>
+          <a:xfrm>
+            <a:off x="3730752" y="3647338"/>
+            <a:ext cx="4041648" cy="228092"/>
+          </a:xfrm>
+          <a:prstGeom prst="rect">
+            <a:avLst/>
+          </a:prstGeom>
+          <a:noFill/>
+          <a:ln/>
+        </p:spPr>
+        <p:txBody>
+          <a:bodyPr wrap="square" lIns="0" tIns="0" rIns="0" bIns="0" rtlCol="0" anchor="ctr"/>
+          <a:lstStyle/>
+          <a:p>
+            <a:pPr indent="0" marL="0">
+              <a:lnSpc>
+                <a:spcPct val="95000"/>
+              </a:lnSpc>
+              <a:buNone/>
+            </a:pPr>
+            <a:r>
+              <a:rPr lang="en-US" sz="1100" dirty="0">
+                <a:solidFill>
+                  <a:srgbClr val="18262B"/>
+                </a:solidFill>
+                <a:latin typeface="Calibri" pitchFamily="34" charset="0"/>
+                <a:ea typeface="Calibri" pitchFamily="34" charset="-122"/>
+                <a:cs typeface="Calibri" pitchFamily="34" charset="-120"/>
+              </a:rPr>
+              <a:t>report.jsonl · retry_queue.jsonl · live progress</a:t>
+            </a:r>
+            <a:endParaRPr lang="en-US" sz="1100" dirty="0"/>
+          </a:p>
+        </p:txBody>
+      </p:sp>
+      <p:sp>
+        <p:nvSpPr>
+          <p:cNvPr id="67" name="Shape 65"/>
+          <p:cNvSpPr/>
+          <p:nvPr/>
+        </p:nvSpPr>
+        <p:spPr>
+          <a:xfrm>
+            <a:off x="3648456" y="3934866"/>
+            <a:ext cx="4206240" cy="0"/>
+          </a:xfrm>
+          <a:prstGeom prst="line">
+            <a:avLst/>
+          </a:prstGeom>
+          <a:noFill/>
+          <a:ln w="12700">
+            <a:solidFill>
+              <a:srgbClr val="C7D6D9"/>
+            </a:solidFill>
+            <a:prstDash val="solid"/>
+          </a:ln>
+        </p:spPr>
+      </p:sp>
+      <p:sp>
+        <p:nvSpPr>
+          <p:cNvPr id="68" name="Text 66"/>
+          <p:cNvSpPr txBox="1"/>
+          <p:nvPr/>
+        </p:nvSpPr>
+        <p:spPr>
+          <a:xfrm>
+            <a:off x="3648456" y="3994302"/>
+            <a:ext cx="4206240" cy="182880"/>
+          </a:xfrm>
+          <a:prstGeom prst="rect">
+            <a:avLst/>
+          </a:prstGeom>
+          <a:noFill/>
+          <a:ln/>
+        </p:spPr>
+        <p:txBody>
+          <a:bodyPr wrap="square" lIns="0" tIns="0" rIns="0" bIns="0" rtlCol="0" anchor="ctr"/>
+          <a:lstStyle/>
+          <a:p>
+            <a:pPr indent="0" marL="0">
+              <a:buNone/>
+            </a:pPr>
+            <a:r>
+              <a:rPr lang="en-US" sz="1100" b="1" spc="60" kern="0" dirty="0">
+                <a:solidFill>
+                  <a:srgbClr val="01606B"/>
+                </a:solidFill>
+                <a:latin typeface="Calibri" pitchFamily="34" charset="0"/>
+                <a:ea typeface="Calibri" pitchFamily="34" charset="-122"/>
+                <a:cs typeface="Calibri" pitchFamily="34" charset="-120"/>
+              </a:rPr>
+              <a:t>STAGE B · assemble — min_days applied here</a:t>
+            </a:r>
+            <a:endParaRPr lang="en-US" sz="1100" dirty="0"/>
+          </a:p>
+        </p:txBody>
+      </p:sp>
+      <p:sp>
+        <p:nvSpPr>
+          <p:cNvPr id="69" name="Shape 67"/>
+          <p:cNvSpPr/>
+          <p:nvPr/>
+        </p:nvSpPr>
+        <p:spPr>
+          <a:xfrm>
+            <a:off x="3648456" y="4177182"/>
+            <a:ext cx="4206240" cy="228092"/>
+          </a:xfrm>
+          <a:prstGeom prst="rect">
+            <a:avLst/>
+          </a:prstGeom>
+          <a:solidFill>
+            <a:srgbClr val="E7F3F4"/>
+          </a:solidFill>
+          <a:ln w="12700">
+            <a:solidFill>
+              <a:srgbClr val="028090"/>
+            </a:solidFill>
+            <a:prstDash val="solid"/>
+          </a:ln>
+        </p:spPr>
+      </p:sp>
+      <p:sp>
+        <p:nvSpPr>
+          <p:cNvPr id="70" name="Text 68"/>
+          <p:cNvSpPr txBox="1"/>
+          <p:nvPr/>
+        </p:nvSpPr>
+        <p:spPr>
+          <a:xfrm>
+            <a:off x="3730752" y="4177182"/>
+            <a:ext cx="4041648" cy="228092"/>
+          </a:xfrm>
+          <a:prstGeom prst="rect">
+            <a:avLst/>
+          </a:prstGeom>
+          <a:noFill/>
+          <a:ln/>
+        </p:spPr>
+        <p:txBody>
+          <a:bodyPr wrap="square" lIns="0" tIns="0" rIns="0" bIns="0" rtlCol="0" anchor="ctr"/>
+          <a:lstStyle/>
+          <a:p>
+            <a:pPr indent="0" marL="0">
+              <a:lnSpc>
+                <a:spcPct val="95000"/>
+              </a:lnSpc>
+              <a:buNone/>
+            </a:pPr>
+            <a:r>
+              <a:rPr lang="en-US" sz="1100" b="1" dirty="0">
+                <a:solidFill>
+                  <a:srgbClr val="01606B"/>
+                </a:solidFill>
+                <a:latin typeface="Calibri" pitchFamily="34" charset="0"/>
+                <a:ea typeface="Calibri" pitchFamily="34" charset="-122"/>
+                <a:cs typeface="Calibri" pitchFamily="34" charset="-120"/>
+              </a:rPr>
+              <a:t>all Stage-A shards → (bin, record) → GroupByKey(bin)</a:t>
+            </a:r>
+            <a:endParaRPr lang="en-US" sz="1100" dirty="0"/>
+          </a:p>
+        </p:txBody>
+      </p:sp>
+      <p:sp>
+        <p:nvSpPr>
+          <p:cNvPr id="71" name="Shape 69"/>
+          <p:cNvSpPr/>
+          <p:nvPr/>
+        </p:nvSpPr>
+        <p:spPr>
+          <a:xfrm>
+            <a:off x="5687568" y="4419778"/>
+            <a:ext cx="128016" cy="91440"/>
+          </a:xfrm>
+          <a:prstGeom prst="downArrow">
+            <a:avLst/>
+          </a:prstGeom>
+          <a:solidFill>
+            <a:srgbClr val="028090"/>
+          </a:solidFill>
+          <a:ln w="6350">
+            <a:solidFill>
+              <a:srgbClr val="028090"/>
+            </a:solidFill>
+            <a:prstDash val="solid"/>
+          </a:ln>
+        </p:spPr>
+      </p:sp>
+      <p:sp>
+        <p:nvSpPr>
+          <p:cNvPr id="72" name="Shape 70"/>
+          <p:cNvSpPr/>
+          <p:nvPr/>
+        </p:nvSpPr>
+        <p:spPr>
+          <a:xfrm>
+            <a:off x="3648456" y="4525721"/>
+            <a:ext cx="4206240" cy="228092"/>
+          </a:xfrm>
+          <a:prstGeom prst="rect">
+            <a:avLst/>
+          </a:prstGeom>
+          <a:solidFill>
+            <a:srgbClr val="F3F8F9"/>
+          </a:solidFill>
+          <a:ln w="9525">
+            <a:solidFill>
+              <a:srgbClr val="E4EBEC"/>
+            </a:solidFill>
+            <a:prstDash val="solid"/>
+          </a:ln>
+        </p:spPr>
+      </p:sp>
+      <p:sp>
+        <p:nvSpPr>
+          <p:cNvPr id="73" name="Text 71"/>
+          <p:cNvSpPr txBox="1"/>
+          <p:nvPr/>
+        </p:nvSpPr>
+        <p:spPr>
+          <a:xfrm>
+            <a:off x="3730752" y="4525721"/>
+            <a:ext cx="4041648" cy="228092"/>
+          </a:xfrm>
+          <a:prstGeom prst="rect">
+            <a:avLst/>
+          </a:prstGeom>
+          <a:noFill/>
+          <a:ln/>
+        </p:spPr>
+        <p:txBody>
+          <a:bodyPr wrap="square" lIns="0" tIns="0" rIns="0" bIns="0" rtlCol="0" anchor="ctr"/>
+          <a:lstStyle/>
+          <a:p>
+            <a:pPr indent="0" marL="0">
+              <a:lnSpc>
+                <a:spcPct val="95000"/>
+              </a:lnSpc>
+              <a:buNone/>
+            </a:pPr>
+            <a:r>
+              <a:rPr lang="en-US" sz="1100" dirty="0">
+                <a:solidFill>
+                  <a:srgbClr val="18262B"/>
+                </a:solidFill>
+                <a:latin typeface="Calibri" pitchFamily="34" charset="0"/>
+                <a:ea typeface="Calibri" pitchFamily="34" charset="-122"/>
+                <a:cs typeface="Calibri" pitchFamily="34" charset="-120"/>
+              </a:rPr>
+              <a:t>pentad mean/σ · g025 · g100 · rg100 · days_present mask</a:t>
+            </a:r>
+            <a:endParaRPr lang="en-US" sz="1100" dirty="0"/>
+          </a:p>
+        </p:txBody>
+      </p:sp>
+      <p:sp>
+        <p:nvSpPr>
+          <p:cNvPr id="74" name="Shape 72"/>
+          <p:cNvSpPr/>
+          <p:nvPr/>
+        </p:nvSpPr>
+        <p:spPr>
+          <a:xfrm>
+            <a:off x="5687568" y="4768317"/>
+            <a:ext cx="128016" cy="91440"/>
+          </a:xfrm>
+          <a:prstGeom prst="downArrow">
+            <a:avLst/>
+          </a:prstGeom>
+          <a:solidFill>
+            <a:srgbClr val="028090"/>
+          </a:solidFill>
+          <a:ln w="6350">
+            <a:solidFill>
+              <a:srgbClr val="028090"/>
+            </a:solidFill>
+            <a:prstDash val="solid"/>
+          </a:ln>
+        </p:spPr>
+      </p:sp>
+      <p:sp>
+        <p:nvSpPr>
+          <p:cNvPr id="75" name="Shape 73"/>
+          <p:cNvSpPr/>
+          <p:nvPr/>
+        </p:nvSpPr>
+        <p:spPr>
+          <a:xfrm>
+            <a:off x="3648456" y="4874260"/>
+            <a:ext cx="4206240" cy="246380"/>
+          </a:xfrm>
+          <a:prstGeom prst="rect">
+            <a:avLst/>
+          </a:prstGeom>
+          <a:solidFill>
+            <a:srgbClr val="E7F3F4"/>
+          </a:solidFill>
+          <a:ln w="12700">
+            <a:solidFill>
+              <a:srgbClr val="028090"/>
+            </a:solidFill>
+            <a:prstDash val="solid"/>
+          </a:ln>
+        </p:spPr>
+      </p:sp>
+      <p:sp>
+        <p:nvSpPr>
+          <p:cNvPr id="76" name="Text 74"/>
+          <p:cNvSpPr txBox="1"/>
+          <p:nvPr/>
+        </p:nvSpPr>
+        <p:spPr>
+          <a:xfrm>
+            <a:off x="3730752" y="4874260"/>
+            <a:ext cx="4041648" cy="246380"/>
+          </a:xfrm>
+          <a:prstGeom prst="rect">
+            <a:avLst/>
+          </a:prstGeom>
+          <a:noFill/>
+          <a:ln/>
+        </p:spPr>
+        <p:txBody>
+          <a:bodyPr wrap="square" lIns="0" tIns="0" rIns="0" bIns="0" rtlCol="0" anchor="ctr"/>
+          <a:lstStyle/>
+          <a:p>
+            <a:pPr indent="0" marL="0">
+              <a:lnSpc>
+                <a:spcPct val="95000"/>
+              </a:lnSpc>
+              <a:buNone/>
+            </a:pPr>
+            <a:r>
+              <a:rPr lang="en-US" sz="1100" b="1" dirty="0">
+                <a:solidFill>
+                  <a:srgbClr val="01606B"/>
+                </a:solidFill>
+                <a:latin typeface="Calibri" pitchFamily="34" charset="0"/>
+                <a:ea typeface="Calibri" pitchFamily="34" charset="-122"/>
+                <a:cs typeface="Calibri" pitchFamily="34" charset="-120"/>
+              </a:rPr>
+              <a:t>WriteToTFRecord — 64 shards/group + spec.json + coverage.json</a:t>
+            </a:r>
+            <a:endParaRPr lang="en-US" sz="1100" dirty="0"/>
+          </a:p>
+        </p:txBody>
+      </p:sp>
+      <p:sp>
+        <p:nvSpPr>
+          <p:cNvPr id="77" name="Shape 75"/>
+          <p:cNvSpPr/>
+          <p:nvPr/>
+        </p:nvSpPr>
+        <p:spPr>
+          <a:xfrm>
+            <a:off x="8238744" y="1170432"/>
+            <a:ext cx="3474720" cy="219456"/>
+          </a:xfrm>
+          <a:prstGeom prst="rect">
+            <a:avLst/>
+          </a:prstGeom>
+          <a:solidFill>
+            <a:srgbClr val="E7F3F4"/>
+          </a:solidFill>
+          <a:ln w="6350">
+            <a:solidFill>
+              <a:srgbClr val="E7F3F4"/>
+            </a:solidFill>
+            <a:prstDash val="solid"/>
+          </a:ln>
+        </p:spPr>
+      </p:sp>
+      <p:sp>
+        <p:nvSpPr>
+          <p:cNvPr id="78" name="Text 76"/>
+          <p:cNvSpPr txBox="1"/>
+          <p:nvPr/>
+        </p:nvSpPr>
+        <p:spPr>
+          <a:xfrm>
+            <a:off x="8311896" y="1170432"/>
+            <a:ext cx="3328416" cy="219456"/>
+          </a:xfrm>
+          <a:prstGeom prst="rect">
+            <a:avLst/>
+          </a:prstGeom>
+          <a:noFill/>
+          <a:ln/>
+        </p:spPr>
+        <p:txBody>
+          <a:bodyPr wrap="square" lIns="0" tIns="0" rIns="0" bIns="0" rtlCol="0" anchor="ctr"/>
+          <a:lstStyle/>
+          <a:p>
+            <a:pPr indent="0" marL="0">
+              <a:buNone/>
+            </a:pPr>
+            <a:r>
+              <a:rPr lang="en-US" sz="1150" b="1" dirty="0">
+                <a:solidFill>
+                  <a:srgbClr val="01606B"/>
+                </a:solidFill>
+                <a:latin typeface="Calibri" pitchFamily="34" charset="0"/>
+                <a:ea typeface="Calibri" pitchFamily="34" charset="-122"/>
+                <a:cs typeface="Calibri" pitchFamily="34" charset="-120"/>
+              </a:rPr>
+              <a:t>Stage A · one Example per source-day</a:t>
+            </a:r>
+            <a:endParaRPr lang="en-US" sz="1150" dirty="0"/>
+          </a:p>
+        </p:txBody>
+      </p:sp>
+      <p:sp>
+        <p:nvSpPr>
+          <p:cNvPr id="79" name="Text 77"/>
+          <p:cNvSpPr txBox="1"/>
+          <p:nvPr/>
+        </p:nvSpPr>
+        <p:spPr>
+          <a:xfrm>
+            <a:off x="8257032" y="1417320"/>
+            <a:ext cx="3438144" cy="747776"/>
+          </a:xfrm>
+          <a:prstGeom prst="rect">
+            <a:avLst/>
+          </a:prstGeom>
+          <a:noFill/>
+          <a:ln/>
+        </p:spPr>
+        <p:txBody>
+          <a:bodyPr wrap="square" lIns="0" tIns="0" rIns="0" bIns="0" rtlCol="0" anchor="t"/>
+          <a:lstStyle/>
+          <a:p>
+            <a:pPr indent="0" marL="0">
+              <a:lnSpc>
+                <a:spcPct val="97000"/>
+              </a:lnSpc>
+              <a:buNone/>
+            </a:pPr>
+            <a:r>
+              <a:rPr lang="en-US" sz="1100" dirty="0">
+                <a:solidFill>
+                  <a:srgbClr val="18262B"/>
+                </a:solidFill>
+                <a:latin typeface="Calibri" pitchFamily="34" charset="0"/>
+                <a:ea typeface="Calibri" pitchFamily="34" charset="-122"/>
+                <a:cs typeface="Calibri" pitchFamily="34" charset="-120"/>
+              </a:rPr>
+              <a:t>&lt;source&gt;/&lt;item_id&gt;.tfrecord + .done · values float32 [C,H,W] + bit-packed mask · explicit axes · var_names/units · source_url/sha256/fetched_at · transform · units are the source's own, no z-scoring</a:t>
+            </a:r>
+            <a:endParaRPr lang="en-US" sz="1100" dirty="0"/>
+          </a:p>
+        </p:txBody>
+      </p:sp>
+      <p:sp>
+        <p:nvSpPr>
+          <p:cNvPr id="80" name="Shape 78"/>
+          <p:cNvSpPr/>
+          <p:nvPr/>
+        </p:nvSpPr>
+        <p:spPr>
+          <a:xfrm>
+            <a:off x="8238744" y="2334937"/>
+            <a:ext cx="3474720" cy="219456"/>
+          </a:xfrm>
+          <a:prstGeom prst="rect">
+            <a:avLst/>
+          </a:prstGeom>
+          <a:solidFill>
+            <a:srgbClr val="E7F3F4"/>
+          </a:solidFill>
+          <a:ln w="6350">
+            <a:solidFill>
+              <a:srgbClr val="E7F3F4"/>
+            </a:solidFill>
+            <a:prstDash val="solid"/>
+          </a:ln>
+        </p:spPr>
+      </p:sp>
+      <p:sp>
+        <p:nvSpPr>
+          <p:cNvPr id="81" name="Text 79"/>
+          <p:cNvSpPr txBox="1"/>
+          <p:nvPr/>
+        </p:nvSpPr>
+        <p:spPr>
+          <a:xfrm>
+            <a:off x="8311896" y="2334937"/>
+            <a:ext cx="3328416" cy="219456"/>
+          </a:xfrm>
+          <a:prstGeom prst="rect">
+            <a:avLst/>
+          </a:prstGeom>
+          <a:noFill/>
+          <a:ln/>
+        </p:spPr>
+        <p:txBody>
+          <a:bodyPr wrap="square" lIns="0" tIns="0" rIns="0" bIns="0" rtlCol="0" anchor="ctr"/>
+          <a:lstStyle/>
+          <a:p>
+            <a:pPr indent="0" marL="0">
+              <a:buNone/>
+            </a:pPr>
+            <a:r>
+              <a:rPr lang="en-US" sz="1150" b="1" dirty="0">
+                <a:solidFill>
+                  <a:srgbClr val="01606B"/>
+                </a:solidFill>
+                <a:latin typeface="Calibri" pitchFamily="34" charset="0"/>
+                <a:ea typeface="Calibri" pitchFamily="34" charset="-122"/>
+                <a:cs typeface="Calibri" pitchFamily="34" charset="-120"/>
+              </a:rPr>
+              <a:t>Stage B · one Example per (pentad bin, group)</a:t>
+            </a:r>
+            <a:endParaRPr lang="en-US" sz="1150" dirty="0"/>
+          </a:p>
+        </p:txBody>
+      </p:sp>
+      <p:sp>
+        <p:nvSpPr>
+          <p:cNvPr id="82" name="Text 80"/>
+          <p:cNvSpPr txBox="1"/>
+          <p:nvPr/>
+        </p:nvSpPr>
+        <p:spPr>
+          <a:xfrm>
+            <a:off x="8257032" y="2581825"/>
+            <a:ext cx="3438144" cy="574548"/>
+          </a:xfrm>
+          <a:prstGeom prst="rect">
+            <a:avLst/>
+          </a:prstGeom>
+          <a:noFill/>
+          <a:ln/>
+        </p:spPr>
+        <p:txBody>
+          <a:bodyPr wrap="square" lIns="0" tIns="0" rIns="0" bIns="0" rtlCol="0" anchor="t"/>
+          <a:lstStyle/>
+          <a:p>
+            <a:pPr indent="0" marL="0">
+              <a:lnSpc>
+                <a:spcPct val="97000"/>
+              </a:lnSpc>
+              <a:buNone/>
+            </a:pPr>
+            <a:r>
+              <a:rPr lang="en-US" sz="1100" dirty="0">
+                <a:solidFill>
+                  <a:srgbClr val="18262B"/>
+                </a:solidFill>
+                <a:latin typeface="Calibri" pitchFamily="34" charset="0"/>
+                <a:ea typeface="Calibri" pitchFamily="34" charset="-122"/>
+                <a:cs typeface="Calibri" pitchFamily="34" charset="-120"/>
+              </a:rPr>
+              <a:t>pentad/&lt;group&gt;/part-SSSSS-of-NNNNN · days_present per channel · spec.json carries the norms, so the split stays a trainer decision.</a:t>
+            </a:r>
+            <a:endParaRPr lang="en-US" sz="1100" dirty="0"/>
+          </a:p>
+        </p:txBody>
+      </p:sp>
+      <p:sp>
+        <p:nvSpPr>
+          <p:cNvPr id="83" name="Shape 81"/>
+          <p:cNvSpPr/>
+          <p:nvPr/>
+        </p:nvSpPr>
+        <p:spPr>
+          <a:xfrm>
+            <a:off x="8238744" y="3326215"/>
+            <a:ext cx="3474720" cy="219456"/>
+          </a:xfrm>
+          <a:prstGeom prst="rect">
+            <a:avLst/>
+          </a:prstGeom>
+          <a:solidFill>
+            <a:srgbClr val="E7F3F4"/>
+          </a:solidFill>
+          <a:ln w="6350">
+            <a:solidFill>
+              <a:srgbClr val="E7F3F4"/>
+            </a:solidFill>
+            <a:prstDash val="solid"/>
+          </a:ln>
+        </p:spPr>
+      </p:sp>
+      <p:sp>
+        <p:nvSpPr>
+          <p:cNvPr id="84" name="Text 82"/>
+          <p:cNvSpPr txBox="1"/>
+          <p:nvPr/>
+        </p:nvSpPr>
+        <p:spPr>
+          <a:xfrm>
+            <a:off x="8311896" y="3326215"/>
+            <a:ext cx="3328416" cy="219456"/>
+          </a:xfrm>
+          <a:prstGeom prst="rect">
+            <a:avLst/>
+          </a:prstGeom>
+          <a:noFill/>
+          <a:ln/>
+        </p:spPr>
+        <p:txBody>
+          <a:bodyPr wrap="square" lIns="0" tIns="0" rIns="0" bIns="0" rtlCol="0" anchor="ctr"/>
+          <a:lstStyle/>
+          <a:p>
+            <a:pPr indent="0" marL="0">
+              <a:buNone/>
+            </a:pPr>
+            <a:r>
+              <a:rPr lang="en-US" sz="1150" b="1" dirty="0">
+                <a:solidFill>
+                  <a:srgbClr val="01606B"/>
+                </a:solidFill>
+                <a:latin typeface="Calibri" pitchFamily="34" charset="0"/>
+                <a:ea typeface="Calibri" pitchFamily="34" charset="-122"/>
+                <a:cs typeface="Calibri" pitchFamily="34" charset="-120"/>
+              </a:rPr>
+              <a:t>Read it</a:t>
+            </a:r>
+            <a:endParaRPr lang="en-US" sz="1150" dirty="0"/>
+          </a:p>
+        </p:txBody>
+      </p:sp>
+      <p:sp>
+        <p:nvSpPr>
+          <p:cNvPr id="85" name="Text 83"/>
+          <p:cNvSpPr txBox="1"/>
+          <p:nvPr/>
+        </p:nvSpPr>
+        <p:spPr>
+          <a:xfrm>
+            <a:off x="8257032" y="3573103"/>
+            <a:ext cx="3438144" cy="401320"/>
+          </a:xfrm>
+          <a:prstGeom prst="rect">
+            <a:avLst/>
+          </a:prstGeom>
+          <a:noFill/>
+          <a:ln/>
+        </p:spPr>
+        <p:txBody>
+          <a:bodyPr wrap="square" lIns="0" tIns="0" rIns="0" bIns="0" rtlCol="0" anchor="t"/>
+          <a:lstStyle/>
+          <a:p>
+            <a:pPr indent="0" marL="0">
+              <a:lnSpc>
+                <a:spcPct val="97000"/>
+              </a:lnSpc>
+              <a:buNone/>
+            </a:pPr>
+            <a:r>
+              <a:rPr lang="en-US" sz="1100" dirty="0">
+                <a:solidFill>
+                  <a:srgbClr val="18262B"/>
+                </a:solidFill>
+                <a:latin typeface="Calibri" pitchFamily="34" charset="0"/>
+                <a:ea typeface="Calibri" pitchFamily="34" charset="-122"/>
+                <a:cs typeface="Calibri" pitchFamily="34" charset="-120"/>
+              </a:rPr>
+              <a:t>tf.data.TFRecordDataset, or the pure-Python reader with no TensorFlow import — both tested, identical values.</a:t>
+            </a:r>
+            <a:endParaRPr lang="en-US" sz="1100" dirty="0"/>
+          </a:p>
+        </p:txBody>
+      </p:sp>
+      <p:sp>
+        <p:nvSpPr>
+          <p:cNvPr id="86" name="Shape 84"/>
+          <p:cNvSpPr/>
+          <p:nvPr/>
+        </p:nvSpPr>
+        <p:spPr>
+          <a:xfrm>
+            <a:off x="8238744" y="4144264"/>
+            <a:ext cx="3474720" cy="219456"/>
+          </a:xfrm>
+          <a:prstGeom prst="rect">
+            <a:avLst/>
+          </a:prstGeom>
+          <a:solidFill>
+            <a:srgbClr val="E7F3F4"/>
+          </a:solidFill>
+          <a:ln w="6350">
+            <a:solidFill>
+              <a:srgbClr val="E7F3F4"/>
+            </a:solidFill>
+            <a:prstDash val="solid"/>
+          </a:ln>
+        </p:spPr>
+      </p:sp>
+      <p:sp>
+        <p:nvSpPr>
+          <p:cNvPr id="87" name="Text 85"/>
+          <p:cNvSpPr txBox="1"/>
+          <p:nvPr/>
+        </p:nvSpPr>
+        <p:spPr>
+          <a:xfrm>
+            <a:off x="8311896" y="4144264"/>
+            <a:ext cx="3328416" cy="219456"/>
+          </a:xfrm>
+          <a:prstGeom prst="rect">
+            <a:avLst/>
+          </a:prstGeom>
+          <a:noFill/>
+          <a:ln/>
+        </p:spPr>
+        <p:txBody>
+          <a:bodyPr wrap="square" lIns="0" tIns="0" rIns="0" bIns="0" rtlCol="0" anchor="ctr"/>
+          <a:lstStyle/>
+          <a:p>
+            <a:pPr indent="0" marL="0">
+              <a:buNone/>
+            </a:pPr>
+            <a:r>
+              <a:rPr lang="en-US" sz="1150" b="1" dirty="0">
+                <a:solidFill>
+                  <a:srgbClr val="01606B"/>
+                </a:solidFill>
+                <a:latin typeface="Calibri" pitchFamily="34" charset="0"/>
+                <a:ea typeface="Calibri" pitchFamily="34" charset="-122"/>
+                <a:cs typeface="Calibri" pitchFamily="34" charset="-120"/>
+              </a:rPr>
+              <a:t>Tiers</a:t>
+            </a:r>
+            <a:endParaRPr lang="en-US" sz="1150" dirty="0"/>
+          </a:p>
+        </p:txBody>
+      </p:sp>
+      <p:sp>
+        <p:nvSpPr>
+          <p:cNvPr id="88" name="Text 86"/>
+          <p:cNvSpPr txBox="1"/>
+          <p:nvPr/>
+        </p:nvSpPr>
+        <p:spPr>
+          <a:xfrm>
+            <a:off x="8257032" y="4391152"/>
+            <a:ext cx="3438144" cy="747776"/>
+          </a:xfrm>
+          <a:prstGeom prst="rect">
+            <a:avLst/>
+          </a:prstGeom>
+          <a:noFill/>
+          <a:ln/>
+        </p:spPr>
+        <p:txBody>
+          <a:bodyPr wrap="square" lIns="0" tIns="0" rIns="0" bIns="0" rtlCol="0" anchor="t"/>
+          <a:lstStyle/>
+          <a:p>
+            <a:pPr indent="0" marL="0">
+              <a:lnSpc>
+                <a:spcPct val="97000"/>
+              </a:lnSpc>
+              <a:buNone/>
+            </a:pPr>
+            <a:r>
+              <a:rPr lang="en-US" sz="1100" dirty="0">
+                <a:solidFill>
+                  <a:srgbClr val="18262B"/>
+                </a:solidFill>
+                <a:latin typeface="Calibri" pitchFamily="34" charset="0"/>
+                <a:ea typeface="Calibri" pitchFamily="34" charset="-122"/>
+                <a:cs typeface="Calibri" pitchFamily="34" charset="-120"/>
+              </a:rPr>
+              <a:t>Tier 0 (family 7's inputs) 1,131 items · ~925 GB wire, 880 GB of it GLORYS — or ~185 GB via the optional mirror · Tier 1 DUACS + EN4/WWV/OLR/GODAS/ENSO · Tier 2 gated on Chris's free CDS account</a:t>
+            </a:r>
+            <a:endParaRPr lang="en-US" sz="1100" dirty="0"/>
+          </a:p>
+        </p:txBody>
+      </p:sp>
+      <p:sp>
+        <p:nvSpPr>
+          <p:cNvPr id="89" name="Text 87"/>
+          <p:cNvSpPr txBox="1"/>
+          <p:nvPr/>
+        </p:nvSpPr>
+        <p:spPr>
+          <a:xfrm>
+            <a:off x="384048" y="5340096"/>
+            <a:ext cx="4023360" cy="219456"/>
+          </a:xfrm>
+          <a:prstGeom prst="rect">
+            <a:avLst/>
+          </a:prstGeom>
+          <a:noFill/>
+          <a:ln/>
+        </p:spPr>
+        <p:txBody>
+          <a:bodyPr wrap="square" lIns="0" tIns="0" rIns="0" bIns="0" rtlCol="0" anchor="ctr"/>
+          <a:lstStyle/>
+          <a:p>
+            <a:pPr indent="0" marL="0">
+              <a:buNone/>
+            </a:pPr>
+            <a:r>
+              <a:rPr lang="en-US" sz="1150" b="1" dirty="0">
+                <a:solidFill>
+                  <a:srgbClr val="01606B"/>
+                </a:solidFill>
+                <a:latin typeface="Calibri" pitchFamily="34" charset="0"/>
+                <a:ea typeface="Calibri" pitchFamily="34" charset="-122"/>
+                <a:cs typeface="Calibri" pitchFamily="34" charset="-120"/>
+              </a:rPr>
+              <a:t>Politeness without loss (load-bearing)</a:t>
+            </a:r>
+            <a:endParaRPr lang="en-US" sz="1150" dirty="0"/>
+          </a:p>
+        </p:txBody>
+      </p:sp>
+      <p:sp>
+        <p:nvSpPr>
+          <p:cNvPr id="90" name="Shape 88"/>
+          <p:cNvSpPr/>
+          <p:nvPr/>
+        </p:nvSpPr>
+        <p:spPr>
+          <a:xfrm>
+            <a:off x="384048" y="5596128"/>
+            <a:ext cx="1827733" cy="611124"/>
+          </a:xfrm>
+          <a:prstGeom prst="roundRect">
+            <a:avLst>
+              <a:gd name="adj" fmla="val 7481"/>
+            </a:avLst>
+          </a:prstGeom>
+          <a:solidFill>
+            <a:srgbClr val="E7F3F4"/>
           </a:solidFill>
           <a:ln w="9525">
             <a:solidFill>
@@ -2729,14 +3990,14 @@
       </p:sp>
       <p:sp>
         <p:nvSpPr>
-          <p:cNvPr id="54" name="Text 52"/>
-          <p:cNvSpPr txBox="1"/>
-          <p:nvPr/>
-        </p:nvSpPr>
-        <p:spPr>
-          <a:xfrm>
-            <a:off x="4370832" y="1689049"/>
-            <a:ext cx="3493008" cy="264668"/>
+          <p:cNvPr id="91" name="Text 89"/>
+          <p:cNvSpPr txBox="1"/>
+          <p:nvPr/>
+        </p:nvSpPr>
+        <p:spPr>
+          <a:xfrm>
+            <a:off x="457200" y="5596128"/>
+            <a:ext cx="1681429" cy="611124"/>
           </a:xfrm>
           <a:prstGeom prst="rect">
             <a:avLst/>
@@ -2748,7 +4009,7 @@
           <a:bodyPr wrap="square" lIns="0" tIns="0" rIns="0" bIns="0" rtlCol="0" anchor="ctr"/>
           <a:lstStyle/>
           <a:p>
-            <a:pPr indent="0" marL="0">
+            <a:pPr algn="ctr" indent="0" marL="0">
               <a:lnSpc>
                 <a:spcPct val="95000"/>
               </a:lnSpc>
@@ -2763,7 +4024,7 @@
                 <a:ea typeface="Calibri" pitchFamily="34" charset="-122"/>
                 <a:cs typeface="Calibri" pitchFamily="34" charset="-120"/>
               </a:rPr>
-              <a:t>manifest of work items (month/year/var-year/file)</a:t>
+              <a:t>backoff 60 s → 5 → 15 → 60 min, honour Retry-After</a:t>
             </a:r>
             <a:endParaRPr lang="en-US" sz="1100" dirty="0"/>
           </a:p>
@@ -2771,45 +4032,22 @@
       </p:sp>
       <p:sp>
         <p:nvSpPr>
-          <p:cNvPr id="55" name="Shape 53"/>
+          <p:cNvPr id="92" name="Shape 90"/>
           <p:cNvSpPr/>
           <p:nvPr/>
         </p:nvSpPr>
         <p:spPr>
           <a:xfrm>
-            <a:off x="6048756" y="1984680"/>
-            <a:ext cx="137160" cy="109728"/>
-          </a:xfrm>
-          <a:prstGeom prst="downArrow">
-            <a:avLst/>
-          </a:prstGeom>
-          <a:solidFill>
-            <a:srgbClr val="028090"/>
-          </a:solidFill>
-          <a:ln w="6350">
-            <a:solidFill>
-              <a:srgbClr val="028090"/>
-            </a:solidFill>
-            <a:prstDash val="solid"/>
-          </a:ln>
-        </p:spPr>
-      </p:sp>
-      <p:sp>
-        <p:nvSpPr>
-          <p:cNvPr id="56" name="Shape 54"/>
-          <p:cNvSpPr/>
-          <p:nvPr/>
-        </p:nvSpPr>
-        <p:spPr>
-          <a:xfrm>
-            <a:off x="4288536" y="2125370"/>
-            <a:ext cx="3657600" cy="264668"/>
-          </a:xfrm>
-          <a:prstGeom prst="rect">
-            <a:avLst/>
-          </a:prstGeom>
-          <a:solidFill>
-            <a:srgbClr val="FFFFFF"/>
+            <a:off x="2303221" y="5596128"/>
+            <a:ext cx="1827733" cy="611124"/>
+          </a:xfrm>
+          <a:prstGeom prst="roundRect">
+            <a:avLst>
+              <a:gd name="adj" fmla="val 7481"/>
+            </a:avLst>
+          </a:prstGeom>
+          <a:solidFill>
+            <a:srgbClr val="E7F3F4"/>
           </a:solidFill>
           <a:ln w="9525">
             <a:solidFill>
@@ -2821,14 +4059,14 @@
       </p:sp>
       <p:sp>
         <p:nvSpPr>
-          <p:cNvPr id="57" name="Text 55"/>
-          <p:cNvSpPr txBox="1"/>
-          <p:nvPr/>
-        </p:nvSpPr>
-        <p:spPr>
-          <a:xfrm>
-            <a:off x="4370832" y="2125370"/>
-            <a:ext cx="3493008" cy="264668"/>
+          <p:cNvPr id="93" name="Text 91"/>
+          <p:cNvSpPr txBox="1"/>
+          <p:nvPr/>
+        </p:nvSpPr>
+        <p:spPr>
+          <a:xfrm>
+            <a:off x="2376373" y="5596128"/>
+            <a:ext cx="1681429" cy="611124"/>
           </a:xfrm>
           <a:prstGeom prst="rect">
             <a:avLst/>
@@ -2840,7 +4078,7 @@
           <a:bodyPr wrap="square" lIns="0" tIns="0" rIns="0" bIns="0" rtlCol="0" anchor="ctr"/>
           <a:lstStyle/>
           <a:p>
-            <a:pPr indent="0" marL="0">
+            <a:pPr algn="ctr" indent="0" marL="0">
               <a:lnSpc>
                 <a:spcPct val="95000"/>
               </a:lnSpc>
@@ -2855,7 +4093,7 @@
                 <a:ea typeface="Calibri" pitchFamily="34" charset="-122"/>
                 <a:cs typeface="Calibri" pitchFamily="34" charset="-120"/>
               </a:rPr>
-              <a:t>skip what the Hub already has (listing + HEAD)</a:t>
+              <a:t>breaker: 5 failures → lane stops, items go to the QUEUE</a:t>
             </a:r>
             <a:endParaRPr lang="en-US" sz="1100" dirty="0"/>
           </a:p>
@@ -2863,45 +4101,22 @@
       </p:sp>
       <p:sp>
         <p:nvSpPr>
-          <p:cNvPr id="58" name="Shape 56"/>
+          <p:cNvPr id="94" name="Shape 92"/>
           <p:cNvSpPr/>
           <p:nvPr/>
         </p:nvSpPr>
         <p:spPr>
           <a:xfrm>
-            <a:off x="6048756" y="2421001"/>
-            <a:ext cx="137160" cy="109728"/>
-          </a:xfrm>
-          <a:prstGeom prst="downArrow">
-            <a:avLst/>
-          </a:prstGeom>
-          <a:solidFill>
-            <a:srgbClr val="028090"/>
-          </a:solidFill>
-          <a:ln w="6350">
-            <a:solidFill>
-              <a:srgbClr val="028090"/>
-            </a:solidFill>
-            <a:prstDash val="solid"/>
-          </a:ln>
-        </p:spPr>
-      </p:sp>
-      <p:sp>
-        <p:nvSpPr>
-          <p:cNvPr id="59" name="Shape 57"/>
-          <p:cNvSpPr/>
-          <p:nvPr/>
-        </p:nvSpPr>
-        <p:spPr>
-          <a:xfrm>
-            <a:off x="4288536" y="2561692"/>
-            <a:ext cx="3657600" cy="264668"/>
-          </a:xfrm>
-          <a:prstGeom prst="rect">
-            <a:avLst/>
-          </a:prstGeom>
-          <a:solidFill>
-            <a:srgbClr val="FFFFFF"/>
+            <a:off x="4222394" y="5596128"/>
+            <a:ext cx="1827733" cy="611124"/>
+          </a:xfrm>
+          <a:prstGeom prst="roundRect">
+            <a:avLst>
+              <a:gd name="adj" fmla="val 7481"/>
+            </a:avLst>
+          </a:prstGeom>
+          <a:solidFill>
+            <a:srgbClr val="E7F3F4"/>
           </a:solidFill>
           <a:ln w="9525">
             <a:solidFill>
@@ -2913,14 +4128,14 @@
       </p:sp>
       <p:sp>
         <p:nvSpPr>
-          <p:cNvPr id="60" name="Text 58"/>
-          <p:cNvSpPr txBox="1"/>
-          <p:nvPr/>
-        </p:nvSpPr>
-        <p:spPr>
-          <a:xfrm>
-            <a:off x="4370832" y="2561692"/>
-            <a:ext cx="3493008" cy="264668"/>
+          <p:cNvPr id="95" name="Text 93"/>
+          <p:cNvSpPr txBox="1"/>
+          <p:nvPr/>
+        </p:nvSpPr>
+        <p:spPr>
+          <a:xfrm>
+            <a:off x="4295546" y="5596128"/>
+            <a:ext cx="1681429" cy="611124"/>
           </a:xfrm>
           <a:prstGeom prst="rect">
             <a:avLst/>
@@ -2932,7 +4147,7 @@
           <a:bodyPr wrap="square" lIns="0" tIns="0" rIns="0" bIns="0" rtlCol="0" anchor="ctr"/>
           <a:lstStyle/>
           <a:p>
-            <a:pPr indent="0" marL="0">
+            <a:pPr algn="ctr" indent="0" marL="0">
               <a:lnSpc>
                 <a:spcPct val="95000"/>
               </a:lnSpc>
@@ -2947,7 +4162,7 @@
                 <a:ea typeface="Calibri" pitchFamily="34" charset="-122"/>
                 <a:cs typeface="Calibri" pitchFamily="34" charset="-120"/>
               </a:rPr>
-              <a:t>key by (host, lane) · GroupByKey</a:t>
+              <a:t>states: written · present · queued · absent — no ‘failed’</a:t>
             </a:r>
             <a:endParaRPr lang="en-US" sz="1100" dirty="0"/>
           </a:p>
@@ -2955,327 +4170,22 @@
       </p:sp>
       <p:sp>
         <p:nvSpPr>
-          <p:cNvPr id="61" name="Shape 59"/>
+          <p:cNvPr id="96" name="Shape 94"/>
           <p:cNvSpPr/>
           <p:nvPr/>
         </p:nvSpPr>
         <p:spPr>
           <a:xfrm>
-            <a:off x="6048756" y="2857322"/>
-            <a:ext cx="137160" cy="109728"/>
-          </a:xfrm>
-          <a:prstGeom prst="downArrow">
-            <a:avLst/>
-          </a:prstGeom>
-          <a:solidFill>
-            <a:srgbClr val="028090"/>
-          </a:solidFill>
-          <a:ln w="6350">
-            <a:solidFill>
-              <a:srgbClr val="028090"/>
-            </a:solidFill>
-            <a:prstDash val="solid"/>
-          </a:ln>
-        </p:spPr>
-      </p:sp>
-      <p:sp>
-        <p:nvSpPr>
-          <p:cNvPr id="62" name="Shape 60"/>
-          <p:cNvSpPr/>
-          <p:nvPr/>
-        </p:nvSpPr>
-        <p:spPr>
-          <a:xfrm>
-            <a:off x="4288536" y="2998013"/>
-            <a:ext cx="3657600" cy="1066038"/>
-          </a:xfrm>
-          <a:prstGeom prst="rect">
-            <a:avLst/>
-          </a:prstGeom>
-          <a:solidFill>
-            <a:srgbClr val="FFFFFF"/>
-          </a:solidFill>
-          <a:ln w="13970">
-            <a:solidFill>
-              <a:srgbClr val="028090"/>
-            </a:solidFill>
-            <a:prstDash val="solid"/>
-          </a:ln>
-        </p:spPr>
-      </p:sp>
-      <p:sp>
-        <p:nvSpPr>
-          <p:cNvPr id="63" name="Text 61"/>
-          <p:cNvSpPr txBox="1"/>
-          <p:nvPr/>
-        </p:nvSpPr>
-        <p:spPr>
-          <a:xfrm>
-            <a:off x="4370832" y="3043733"/>
-            <a:ext cx="3493008" cy="226822"/>
-          </a:xfrm>
-          <a:prstGeom prst="rect">
-            <a:avLst/>
-          </a:prstGeom>
-          <a:noFill/>
-          <a:ln/>
-        </p:spPr>
-        <p:txBody>
-          <a:bodyPr wrap="square" lIns="0" tIns="0" rIns="0" bIns="0" rtlCol="0" anchor="t"/>
-          <a:lstStyle/>
-          <a:p>
-            <a:pPr indent="0" marL="0">
-              <a:buNone/>
-            </a:pPr>
-            <a:r>
-              <a:rPr lang="en-US" sz="1150" b="1" dirty="0">
-                <a:solidFill>
-                  <a:srgbClr val="01606B"/>
-                </a:solidFill>
-                <a:latin typeface="Calibri" pitchFamily="34" charset="0"/>
-                <a:ea typeface="Calibri" pitchFamily="34" charset="-122"/>
-                <a:cs typeface="Calibri" pitchFamily="34" charset="-120"/>
-              </a:rPr>
-              <a:t>LaneWorker</a:t>
-            </a:r>
-            <a:endParaRPr lang="en-US" sz="1150" dirty="0"/>
-          </a:p>
-        </p:txBody>
-      </p:sp>
-      <p:sp>
-        <p:nvSpPr>
-          <p:cNvPr id="64" name="Text 62"/>
-          <p:cNvSpPr txBox="1"/>
-          <p:nvPr/>
-        </p:nvSpPr>
-        <p:spPr>
-          <a:xfrm>
-            <a:off x="4425696" y="3270555"/>
-            <a:ext cx="3383280" cy="191516"/>
-          </a:xfrm>
-          <a:prstGeom prst="rect">
-            <a:avLst/>
-          </a:prstGeom>
-          <a:noFill/>
-          <a:ln/>
-        </p:spPr>
-        <p:txBody>
-          <a:bodyPr wrap="square" lIns="0" tIns="0" rIns="0" bIns="0" rtlCol="0" anchor="t"/>
-          <a:lstStyle/>
-          <a:p>
-            <a:pPr indent="0" marL="0">
-              <a:lnSpc>
-                <a:spcPct val="95000"/>
-              </a:lnSpc>
-              <a:buNone/>
-            </a:pPr>
-            <a:r>
-              <a:rPr lang="en-US" sz="1100" dirty="0">
-                <a:solidFill>
-                  <a:srgbClr val="18262B"/>
-                </a:solidFill>
-                <a:latin typeface="Calibri" pitchFamily="34" charset="0"/>
-                <a:ea typeface="Calibri" pitchFamily="34" charset="-122"/>
-                <a:cs typeface="Calibri" pitchFamily="34" charset="-120"/>
-              </a:rPr>
-              <a:t>pace · fetch (HEAD size → stream → size check)</a:t>
-            </a:r>
-            <a:endParaRPr lang="en-US" sz="1100" dirty="0"/>
-          </a:p>
-        </p:txBody>
-      </p:sp>
-      <p:sp>
-        <p:nvSpPr>
-          <p:cNvPr id="65" name="Text 63"/>
-          <p:cNvSpPr txBox="1"/>
-          <p:nvPr/>
-        </p:nvSpPr>
-        <p:spPr>
-          <a:xfrm>
-            <a:off x="4425696" y="3462071"/>
-            <a:ext cx="3383280" cy="191516"/>
-          </a:xfrm>
-          <a:prstGeom prst="rect">
-            <a:avLst/>
-          </a:prstGeom>
-          <a:noFill/>
-          <a:ln/>
-        </p:spPr>
-        <p:txBody>
-          <a:bodyPr wrap="square" lIns="0" tIns="0" rIns="0" bIns="0" rtlCol="0" anchor="t"/>
-          <a:lstStyle/>
-          <a:p>
-            <a:pPr indent="0" marL="0">
-              <a:lnSpc>
-                <a:spcPct val="95000"/>
-              </a:lnSpc>
-              <a:buNone/>
-            </a:pPr>
-            <a:r>
-              <a:rPr lang="en-US" sz="1100" dirty="0">
-                <a:solidFill>
-                  <a:srgbClr val="18262B"/>
-                </a:solidFill>
-                <a:latin typeface="Calibri" pitchFamily="34" charset="0"/>
-                <a:ea typeface="Calibri" pitchFamily="34" charset="-122"/>
-                <a:cs typeface="Calibri" pitchFamily="34" charset="-120"/>
-              </a:rPr>
-              <a:t>transform: bin 0.25°, aggregate_cadence imported</a:t>
-            </a:r>
-            <a:endParaRPr lang="en-US" sz="1100" dirty="0"/>
-          </a:p>
-        </p:txBody>
-      </p:sp>
-      <p:sp>
-        <p:nvSpPr>
-          <p:cNvPr id="66" name="Text 64"/>
-          <p:cNvSpPr txBox="1"/>
-          <p:nvPr/>
-        </p:nvSpPr>
-        <p:spPr>
-          <a:xfrm>
-            <a:off x="4425696" y="3653587"/>
-            <a:ext cx="3383280" cy="364744"/>
-          </a:xfrm>
-          <a:prstGeom prst="rect">
-            <a:avLst/>
-          </a:prstGeom>
-          <a:noFill/>
-          <a:ln/>
-        </p:spPr>
-        <p:txBody>
-          <a:bodyPr wrap="square" lIns="0" tIns="0" rIns="0" bIns="0" rtlCol="0" anchor="t"/>
-          <a:lstStyle/>
-          <a:p>
-            <a:pPr indent="0" marL="0">
-              <a:lnSpc>
-                <a:spcPct val="95000"/>
-              </a:lnSpc>
-              <a:buNone/>
-            </a:pPr>
-            <a:r>
-              <a:rPr lang="en-US" sz="1100" dirty="0">
-                <a:solidFill>
-                  <a:srgbClr val="18262B"/>
-                </a:solidFill>
-                <a:latin typeface="Calibri" pitchFamily="34" charset="0"/>
-                <a:ea typeface="Calibri" pitchFamily="34" charset="-122"/>
-                <a:cs typeface="Calibri" pitchFamily="34" charset="-120"/>
-              </a:rPr>
-              <a:t>publish (batch commit → download back → sha256 → delete)</a:t>
-            </a:r>
-            <a:endParaRPr lang="en-US" sz="1100" dirty="0"/>
-          </a:p>
-        </p:txBody>
-      </p:sp>
-      <p:sp>
-        <p:nvSpPr>
-          <p:cNvPr id="67" name="Shape 65"/>
-          <p:cNvSpPr/>
-          <p:nvPr/>
-        </p:nvSpPr>
-        <p:spPr>
-          <a:xfrm>
-            <a:off x="4288536" y="4064051"/>
-            <a:ext cx="3657600" cy="428752"/>
-          </a:xfrm>
-          <a:prstGeom prst="rect">
-            <a:avLst/>
+            <a:off x="6141568" y="5596128"/>
+            <a:ext cx="1827733" cy="611124"/>
+          </a:xfrm>
+          <a:prstGeom prst="roundRect">
+            <a:avLst>
+              <a:gd name="adj" fmla="val 7481"/>
+            </a:avLst>
           </a:prstGeom>
           <a:solidFill>
             <a:srgbClr val="E7F3F4"/>
-          </a:solidFill>
-          <a:ln w="6350">
-            <a:solidFill>
-              <a:srgbClr val="E7F3F4"/>
-            </a:solidFill>
-            <a:prstDash val="solid"/>
-          </a:ln>
-        </p:spPr>
-      </p:sp>
-      <p:sp>
-        <p:nvSpPr>
-          <p:cNvPr id="68" name="Text 66"/>
-          <p:cNvSpPr txBox="1"/>
-          <p:nvPr/>
-        </p:nvSpPr>
-        <p:spPr>
-          <a:xfrm>
-            <a:off x="4370832" y="4064051"/>
-            <a:ext cx="3493008" cy="428752"/>
-          </a:xfrm>
-          <a:prstGeom prst="rect">
-            <a:avLst/>
-          </a:prstGeom>
-          <a:noFill/>
-          <a:ln/>
-        </p:spPr>
-        <p:txBody>
-          <a:bodyPr wrap="square" lIns="0" tIns="0" rIns="0" bIns="0" rtlCol="0" anchor="ctr"/>
-          <a:lstStyle/>
-          <a:p>
-            <a:pPr indent="0" marL="0">
-              <a:lnSpc>
-                <a:spcPct val="95000"/>
-              </a:lnSpc>
-              <a:buNone/>
-            </a:pPr>
-            <a:r>
-              <a:rPr lang="en-US" sz="1100" i="1" dirty="0">
-                <a:solidFill>
-                  <a:srgbClr val="01606B"/>
-                </a:solidFill>
-                <a:latin typeface="Calibri" pitchFamily="34" charset="0"/>
-                <a:ea typeface="Calibri" pitchFamily="34" charset="-122"/>
-                <a:cs typeface="Calibri" pitchFamily="34" charset="-120"/>
-              </a:rPr>
-              <a:t>one key = one sequential polite stream; connections ≤ lanes on any runner</a:t>
-            </a:r>
-            <a:endParaRPr lang="en-US" sz="1100" dirty="0"/>
-          </a:p>
-        </p:txBody>
-      </p:sp>
-      <p:sp>
-        <p:nvSpPr>
-          <p:cNvPr id="69" name="Shape 67"/>
-          <p:cNvSpPr/>
-          <p:nvPr/>
-        </p:nvSpPr>
-        <p:spPr>
-          <a:xfrm>
-            <a:off x="6048756" y="4523765"/>
-            <a:ext cx="137160" cy="109728"/>
-          </a:xfrm>
-          <a:prstGeom prst="downArrow">
-            <a:avLst/>
-          </a:prstGeom>
-          <a:solidFill>
-            <a:srgbClr val="028090"/>
-          </a:solidFill>
-          <a:ln w="6350">
-            <a:solidFill>
-              <a:srgbClr val="028090"/>
-            </a:solidFill>
-            <a:prstDash val="solid"/>
-          </a:ln>
-        </p:spPr>
-      </p:sp>
-      <p:sp>
-        <p:nvSpPr>
-          <p:cNvPr id="70" name="Shape 68"/>
-          <p:cNvSpPr/>
-          <p:nvPr/>
-        </p:nvSpPr>
-        <p:spPr>
-          <a:xfrm>
-            <a:off x="4288536" y="4664456"/>
-            <a:ext cx="3657600" cy="437896"/>
-          </a:xfrm>
-          <a:prstGeom prst="rect">
-            <a:avLst/>
-          </a:prstGeom>
-          <a:solidFill>
-            <a:srgbClr val="FFFFFF"/>
           </a:solidFill>
           <a:ln w="9525">
             <a:solidFill>
@@ -3287,14 +4197,14 @@
       </p:sp>
       <p:sp>
         <p:nvSpPr>
-          <p:cNvPr id="71" name="Text 69"/>
-          <p:cNvSpPr txBox="1"/>
-          <p:nvPr/>
-        </p:nvSpPr>
-        <p:spPr>
-          <a:xfrm>
-            <a:off x="4370832" y="4664456"/>
-            <a:ext cx="3493008" cy="437896"/>
+          <p:cNvPr id="97" name="Text 95"/>
+          <p:cNvSpPr txBox="1"/>
+          <p:nvPr/>
+        </p:nvSpPr>
+        <p:spPr>
+          <a:xfrm>
+            <a:off x="6214720" y="5596128"/>
+            <a:ext cx="1681429" cy="611124"/>
           </a:xfrm>
           <a:prstGeom prst="rect">
             <a:avLst/>
@@ -3306,7 +4216,7 @@
           <a:bodyPr wrap="square" lIns="0" tIns="0" rIns="0" bIns="0" rtlCol="0" anchor="ctr"/>
           <a:lstStyle/>
           <a:p>
-            <a:pPr indent="0" marL="0">
+            <a:pPr algn="ctr" indent="0" marL="0">
               <a:lnSpc>
                 <a:spcPct val="95000"/>
               </a:lnSpc>
@@ -3321,7 +4231,7 @@
                 <a:ea typeface="Calibri" pitchFamily="34" charset="-122"/>
                 <a:cs typeface="Calibri" pitchFamily="34" charset="-120"/>
               </a:rPr>
-              <a:t>report.jsonl + summary.md — bytes, wall, backoffs, breaker trips per host</a:t>
+              <a:t>absent needs 404 twice, ≥ 6 h apart, evidence kept</a:t>
             </a:r>
             <a:endParaRPr lang="en-US" sz="1100" dirty="0"/>
           </a:p>
@@ -3329,417 +4239,18 @@
       </p:sp>
       <p:sp>
         <p:nvSpPr>
-          <p:cNvPr id="72" name="Text 70"/>
-          <p:cNvSpPr txBox="1"/>
-          <p:nvPr/>
-        </p:nvSpPr>
-        <p:spPr>
-          <a:xfrm>
-            <a:off x="8330184" y="1243584"/>
-            <a:ext cx="3383280" cy="556260"/>
-          </a:xfrm>
-          <a:prstGeom prst="rect">
-            <a:avLst/>
-          </a:prstGeom>
-          <a:noFill/>
-          <a:ln/>
-        </p:spPr>
-        <p:txBody>
-          <a:bodyPr wrap="square" lIns="0" tIns="0" rIns="0" bIns="0" rtlCol="0" anchor="t"/>
-          <a:lstStyle/>
-          <a:p>
-            <a:pPr indent="0" marL="0">
-              <a:lnSpc>
-                <a:spcPct val="95000"/>
-              </a:lnSpc>
-              <a:buNone/>
-            </a:pPr>
-            <a:r>
-              <a:rPr lang="en-US" sz="1100" i="1" dirty="0">
-                <a:solidFill>
-                  <a:srgbClr val="56666C"/>
-                </a:solidFill>
-                <a:latin typeface="Calibri" pitchFamily="34" charset="0"/>
-                <a:ea typeface="Calibri" pitchFamily="34" charset="-122"/>
-                <a:cs typeface="Calibri" pitchFamily="34" charset="-120"/>
-              </a:rPr>
-              <a:t>One verified copy of every upstream byte. Upload → download back → sha256 equal → only then delete the local file.</a:t>
-            </a:r>
-            <a:endParaRPr lang="en-US" sz="1100" dirty="0"/>
-          </a:p>
-        </p:txBody>
-      </p:sp>
-      <p:sp>
-        <p:nvSpPr>
-          <p:cNvPr id="73" name="Shape 71"/>
+          <p:cNvPr id="98" name="Shape 96"/>
           <p:cNvSpPr/>
           <p:nvPr/>
         </p:nvSpPr>
         <p:spPr>
           <a:xfrm>
-            <a:off x="8330184" y="1900428"/>
-            <a:ext cx="3383280" cy="256032"/>
-          </a:xfrm>
-          <a:prstGeom prst="rect">
-            <a:avLst/>
-          </a:prstGeom>
-          <a:solidFill>
-            <a:srgbClr val="E7F3F4"/>
-          </a:solidFill>
-          <a:ln w="6350">
-            <a:solidFill>
-              <a:srgbClr val="E7F3F4"/>
-            </a:solidFill>
-            <a:prstDash val="solid"/>
-          </a:ln>
-        </p:spPr>
-      </p:sp>
-      <p:sp>
-        <p:nvSpPr>
-          <p:cNvPr id="74" name="Text 72"/>
-          <p:cNvSpPr txBox="1"/>
-          <p:nvPr/>
-        </p:nvSpPr>
-        <p:spPr>
-          <a:xfrm>
-            <a:off x="8403336" y="1900428"/>
-            <a:ext cx="3236976" cy="256032"/>
-          </a:xfrm>
-          <a:prstGeom prst="rect">
-            <a:avLst/>
-          </a:prstGeom>
-          <a:noFill/>
-          <a:ln/>
-        </p:spPr>
-        <p:txBody>
-          <a:bodyPr wrap="square" lIns="0" tIns="0" rIns="0" bIns="0" rtlCol="0" anchor="ctr"/>
-          <a:lstStyle/>
-          <a:p>
-            <a:pPr indent="0" marL="0">
-              <a:buNone/>
-            </a:pPr>
-            <a:r>
-              <a:rPr lang="en-US" sz="1150" b="1" dirty="0">
-                <a:solidFill>
-                  <a:srgbClr val="01606B"/>
-                </a:solidFill>
-                <a:latin typeface="Calibri" pitchFamily="34" charset="0"/>
-                <a:ea typeface="Calibri" pitchFamily="34" charset="-122"/>
-                <a:cs typeface="Calibri" pitchFamily="34" charset="-120"/>
-              </a:rPr>
-              <a:t>Tier 0 · no new account · 1,131 items</a:t>
-            </a:r>
-            <a:endParaRPr lang="en-US" sz="1150" dirty="0"/>
-          </a:p>
-        </p:txBody>
-      </p:sp>
-      <p:sp>
-        <p:nvSpPr>
-          <p:cNvPr id="75" name="Text 73"/>
-          <p:cNvSpPr txBox="1"/>
-          <p:nvPr/>
-        </p:nvSpPr>
-        <p:spPr>
-          <a:xfrm>
-            <a:off x="8348472" y="2193036"/>
-            <a:ext cx="3346704" cy="766064"/>
-          </a:xfrm>
-          <a:prstGeom prst="rect">
-            <a:avLst/>
-          </a:prstGeom>
-          <a:noFill/>
-          <a:ln/>
-        </p:spPr>
-        <p:txBody>
-          <a:bodyPr wrap="square" lIns="0" tIns="0" rIns="0" bIns="0" rtlCol="0" anchor="t"/>
-          <a:lstStyle/>
-          <a:p>
-            <a:pPr indent="0" marL="0">
-              <a:lnSpc>
-                <a:spcPct val="97000"/>
-              </a:lnSpc>
-              <a:buNone/>
-            </a:pPr>
-            <a:r>
-              <a:rPr lang="en-US" sz="1100" dirty="0">
-                <a:solidFill>
-                  <a:srgbClr val="18262B"/>
-                </a:solidFill>
-                <a:latin typeface="Calibri" pitchFamily="34" charset="0"/>
-                <a:ea typeface="Calibri" pitchFamily="34" charset="-122"/>
-                <a:cs typeface="Calibri" pitchFamily="34" charset="-120"/>
-              </a:rPr>
-              <a:t>OISST 44 yr · NCEP R1 560 files · RG Argo 93 · labels (RAPID, Florida cable, OSNAP, MOVE, SAMBA) · statics (ETOPO 2022, Natural Earth) · GLORYS12 384 — verify only, already on the Hub</a:t>
-            </a:r>
-            <a:endParaRPr lang="en-US" sz="1100" dirty="0"/>
-          </a:p>
-        </p:txBody>
-      </p:sp>
-      <p:sp>
-        <p:nvSpPr>
-          <p:cNvPr id="76" name="Shape 74"/>
-          <p:cNvSpPr/>
-          <p:nvPr/>
-        </p:nvSpPr>
-        <p:spPr>
-          <a:xfrm>
-            <a:off x="8330184" y="3026664"/>
-            <a:ext cx="3383280" cy="256032"/>
-          </a:xfrm>
-          <a:prstGeom prst="rect">
-            <a:avLst/>
-          </a:prstGeom>
-          <a:solidFill>
-            <a:srgbClr val="E7F3F4"/>
-          </a:solidFill>
-          <a:ln w="6350">
-            <a:solidFill>
-              <a:srgbClr val="E7F3F4"/>
-            </a:solidFill>
-            <a:prstDash val="solid"/>
-          </a:ln>
-        </p:spPr>
-      </p:sp>
-      <p:sp>
-        <p:nvSpPr>
-          <p:cNvPr id="77" name="Text 75"/>
-          <p:cNvSpPr txBox="1"/>
-          <p:nvPr/>
-        </p:nvSpPr>
-        <p:spPr>
-          <a:xfrm>
-            <a:off x="8403336" y="3026664"/>
-            <a:ext cx="3236976" cy="256032"/>
-          </a:xfrm>
-          <a:prstGeom prst="rect">
-            <a:avLst/>
-          </a:prstGeom>
-          <a:noFill/>
-          <a:ln/>
-        </p:spPr>
-        <p:txBody>
-          <a:bodyPr wrap="square" lIns="0" tIns="0" rIns="0" bIns="0" rtlCol="0" anchor="ctr"/>
-          <a:lstStyle/>
-          <a:p>
-            <a:pPr indent="0" marL="0">
-              <a:buNone/>
-            </a:pPr>
-            <a:r>
-              <a:rPr lang="en-US" sz="1150" b="1" dirty="0">
-                <a:solidFill>
-                  <a:srgbClr val="01606B"/>
-                </a:solidFill>
-                <a:latin typeface="Calibri" pitchFamily="34" charset="0"/>
-                <a:ea typeface="Calibri" pitchFamily="34" charset="-122"/>
-                <a:cs typeface="Calibri" pitchFamily="34" charset="-120"/>
-              </a:rPr>
-              <a:t>Tier 1 · no new account · 519 items</a:t>
-            </a:r>
-            <a:endParaRPr lang="en-US" sz="1150" dirty="0"/>
-          </a:p>
-        </p:txBody>
-      </p:sp>
-      <p:sp>
-        <p:nvSpPr>
-          <p:cNvPr id="78" name="Text 76"/>
-          <p:cNvSpPr txBox="1"/>
-          <p:nvPr/>
-        </p:nvSpPr>
-        <p:spPr>
-          <a:xfrm>
-            <a:off x="8348472" y="3319272"/>
-            <a:ext cx="3346704" cy="766064"/>
-          </a:xfrm>
-          <a:prstGeom prst="rect">
-            <a:avLst/>
-          </a:prstGeom>
-          <a:noFill/>
-          <a:ln/>
-        </p:spPr>
-        <p:txBody>
-          <a:bodyPr wrap="square" lIns="0" tIns="0" rIns="0" bIns="0" rtlCol="0" anchor="t"/>
-          <a:lstStyle/>
-          <a:p>
-            <a:pPr indent="0" marL="0">
-              <a:lnSpc>
-                <a:spcPct val="97000"/>
-              </a:lnSpc>
-              <a:buNone/>
-            </a:pPr>
-            <a:r>
-              <a:rPr lang="en-US" sz="1100" dirty="0">
-                <a:solidFill>
-                  <a:srgbClr val="18262B"/>
-                </a:solidFill>
-                <a:latin typeface="Calibri" pitchFamily="34" charset="0"/>
-                <a:ea typeface="Calibri" pitchFamily="34" charset="-122"/>
-                <a:cs typeface="Calibri" pitchFamily="34" charset="-120"/>
-              </a:rPr>
-              <a:t>DUACS L4 altimetry binned to 0.25° monthly (~1.1 TB wire → ~95 GB stored) — the first observed circulation channel · EN4 · PMEL warm-water volume · OLR · GODAS · ENSO indices · RAPID extras</a:t>
-            </a:r>
-            <a:endParaRPr lang="en-US" sz="1100" dirty="0"/>
-          </a:p>
-        </p:txBody>
-      </p:sp>
-      <p:sp>
-        <p:nvSpPr>
-          <p:cNvPr id="79" name="Shape 77"/>
-          <p:cNvSpPr/>
-          <p:nvPr/>
-        </p:nvSpPr>
-        <p:spPr>
-          <a:xfrm>
-            <a:off x="8330184" y="4152900"/>
-            <a:ext cx="3383280" cy="256032"/>
-          </a:xfrm>
-          <a:prstGeom prst="rect">
-            <a:avLst/>
-          </a:prstGeom>
-          <a:solidFill>
-            <a:srgbClr val="E7F3F4"/>
-          </a:solidFill>
-          <a:ln w="6350">
-            <a:solidFill>
-              <a:srgbClr val="E7F3F4"/>
-            </a:solidFill>
-            <a:prstDash val="solid"/>
-          </a:ln>
-        </p:spPr>
-      </p:sp>
-      <p:sp>
-        <p:nvSpPr>
-          <p:cNvPr id="80" name="Text 78"/>
-          <p:cNvSpPr txBox="1"/>
-          <p:nvPr/>
-        </p:nvSpPr>
-        <p:spPr>
-          <a:xfrm>
-            <a:off x="8403336" y="4152900"/>
-            <a:ext cx="3236976" cy="256032"/>
-          </a:xfrm>
-          <a:prstGeom prst="rect">
-            <a:avLst/>
-          </a:prstGeom>
-          <a:noFill/>
-          <a:ln/>
-        </p:spPr>
-        <p:txBody>
-          <a:bodyPr wrap="square" lIns="0" tIns="0" rIns="0" bIns="0" rtlCol="0" anchor="ctr"/>
-          <a:lstStyle/>
-          <a:p>
-            <a:pPr indent="0" marL="0">
-              <a:buNone/>
-            </a:pPr>
-            <a:r>
-              <a:rPr lang="en-US" sz="1150" b="1" dirty="0">
-                <a:solidFill>
-                  <a:srgbClr val="01606B"/>
-                </a:solidFill>
-                <a:latin typeface="Calibri" pitchFamily="34" charset="0"/>
-                <a:ea typeface="Calibri" pitchFamily="34" charset="-122"/>
-                <a:cs typeface="Calibri" pitchFamily="34" charset="-120"/>
-              </a:rPr>
-              <a:t>Tier 2 · gated</a:t>
-            </a:r>
-            <a:endParaRPr lang="en-US" sz="1150" dirty="0"/>
-          </a:p>
-        </p:txBody>
-      </p:sp>
-      <p:sp>
-        <p:nvSpPr>
-          <p:cNvPr id="81" name="Text 79"/>
-          <p:cNvSpPr txBox="1"/>
-          <p:nvPr/>
-        </p:nvSpPr>
-        <p:spPr>
-          <a:xfrm>
-            <a:off x="8348472" y="4445508"/>
-            <a:ext cx="3346704" cy="592836"/>
-          </a:xfrm>
-          <a:prstGeom prst="rect">
-            <a:avLst/>
-          </a:prstGeom>
-          <a:noFill/>
-          <a:ln/>
-        </p:spPr>
-        <p:txBody>
-          <a:bodyPr wrap="square" lIns="0" tIns="0" rIns="0" bIns="0" rtlCol="0" anchor="t"/>
-          <a:lstStyle/>
-          <a:p>
-            <a:pPr indent="0" marL="0">
-              <a:lnSpc>
-                <a:spcPct val="97000"/>
-              </a:lnSpc>
-              <a:buNone/>
-            </a:pPr>
-            <a:r>
-              <a:rPr lang="en-US" sz="1100" dirty="0">
-                <a:solidFill>
-                  <a:srgbClr val="18262B"/>
-                </a:solidFill>
-                <a:latin typeface="Calibri" pitchFamily="34" charset="0"/>
-                <a:ea typeface="Calibri" pitchFamily="34" charset="-122"/>
-                <a:cs typeface="Calibri" pitchFamily="34" charset="-120"/>
-              </a:rPr>
-              <a:t>ERA5 via CDS — needs Chris's free account · ESA CCI soil moisture (registration) · OSTIA and GREP-3D off by default</a:t>
-            </a:r>
-            <a:endParaRPr lang="en-US" sz="1100" dirty="0"/>
-          </a:p>
-        </p:txBody>
-      </p:sp>
-      <p:sp>
-        <p:nvSpPr>
-          <p:cNvPr id="82" name="Text 80"/>
-          <p:cNvSpPr txBox="1"/>
-          <p:nvPr/>
-        </p:nvSpPr>
-        <p:spPr>
-          <a:xfrm>
-            <a:off x="384048" y="5321808"/>
-            <a:ext cx="3657600" cy="219456"/>
-          </a:xfrm>
-          <a:prstGeom prst="rect">
-            <a:avLst/>
-          </a:prstGeom>
-          <a:noFill/>
-          <a:ln/>
-        </p:spPr>
-        <p:txBody>
-          <a:bodyPr wrap="square" lIns="0" tIns="0" rIns="0" bIns="0" rtlCol="0" anchor="ctr"/>
-          <a:lstStyle/>
-          <a:p>
-            <a:pPr indent="0" marL="0">
-              <a:buNone/>
-            </a:pPr>
-            <a:r>
-              <a:rPr lang="en-US" sz="1150" b="1" dirty="0">
-                <a:solidFill>
-                  <a:srgbClr val="01606B"/>
-                </a:solidFill>
-                <a:latin typeface="Calibri" pitchFamily="34" charset="0"/>
-                <a:ea typeface="Calibri" pitchFamily="34" charset="-122"/>
-                <a:cs typeface="Calibri" pitchFamily="34" charset="-120"/>
-              </a:rPr>
-              <a:t>Politeness rules (load-bearing)</a:t>
-            </a:r>
-            <a:endParaRPr lang="en-US" sz="1150" dirty="0"/>
-          </a:p>
-        </p:txBody>
-      </p:sp>
-      <p:sp>
-        <p:nvSpPr>
-          <p:cNvPr id="83" name="Shape 81"/>
-          <p:cNvSpPr/>
-          <p:nvPr/>
-        </p:nvSpPr>
-        <p:spPr>
-          <a:xfrm>
-            <a:off x="384048" y="5577840"/>
-            <a:ext cx="1827733" cy="566928"/>
+            <a:off x="8060741" y="5596128"/>
+            <a:ext cx="1827733" cy="611124"/>
           </a:xfrm>
           <a:prstGeom prst="roundRect">
             <a:avLst>
-              <a:gd name="adj" fmla="val 8065"/>
+              <a:gd name="adj" fmla="val 7481"/>
             </a:avLst>
           </a:prstGeom>
           <a:solidFill>
@@ -3755,14 +4266,14 @@
       </p:sp>
       <p:sp>
         <p:nvSpPr>
-          <p:cNvPr id="84" name="Text 82"/>
-          <p:cNvSpPr txBox="1"/>
-          <p:nvPr/>
-        </p:nvSpPr>
-        <p:spPr>
-          <a:xfrm>
-            <a:off x="448056" y="5577840"/>
-            <a:ext cx="1699717" cy="566928"/>
+          <p:cNvPr id="99" name="Text 97"/>
+          <p:cNvSpPr txBox="1"/>
+          <p:nvPr/>
+        </p:nvSpPr>
+        <p:spPr>
+          <a:xfrm>
+            <a:off x="8133893" y="5596128"/>
+            <a:ext cx="1681429" cy="611124"/>
           </a:xfrm>
           <a:prstGeom prst="rect">
             <a:avLst/>
@@ -3789,7 +4300,7 @@
                 <a:ea typeface="Calibri" pitchFamily="34" charset="-122"/>
                 <a:cs typeface="Calibri" pitchFamily="34" charset="-120"/>
               </a:rPr>
-              <a:t>backoff 60 s → 5 → 15 → 60 min, honour Retry-After</a:t>
+              <a:t>never raise on a transient error — a bundle retry is a hammer</a:t>
             </a:r>
             <a:endParaRPr lang="en-US" sz="1100" dirty="0"/>
           </a:p>
@@ -3797,18 +4308,18 @@
       </p:sp>
       <p:sp>
         <p:nvSpPr>
-          <p:cNvPr id="85" name="Shape 83"/>
+          <p:cNvPr id="100" name="Shape 98"/>
           <p:cNvSpPr/>
           <p:nvPr/>
         </p:nvSpPr>
         <p:spPr>
           <a:xfrm>
-            <a:off x="2303221" y="5577840"/>
-            <a:ext cx="1827733" cy="566928"/>
+            <a:off x="9979914" y="5596128"/>
+            <a:ext cx="1827733" cy="611124"/>
           </a:xfrm>
           <a:prstGeom prst="roundRect">
             <a:avLst>
-              <a:gd name="adj" fmla="val 8065"/>
+              <a:gd name="adj" fmla="val 7481"/>
             </a:avLst>
           </a:prstGeom>
           <a:solidFill>
@@ -3824,14 +4335,14 @@
       </p:sp>
       <p:sp>
         <p:nvSpPr>
-          <p:cNvPr id="86" name="Text 84"/>
-          <p:cNvSpPr txBox="1"/>
-          <p:nvPr/>
-        </p:nvSpPr>
-        <p:spPr>
-          <a:xfrm>
-            <a:off x="2367229" y="5577840"/>
-            <a:ext cx="1699717" cy="566928"/>
+          <p:cNvPr id="101" name="Text 99"/>
+          <p:cNvSpPr txBox="1"/>
+          <p:nvPr/>
+        </p:nvSpPr>
+        <p:spPr>
+          <a:xfrm>
+            <a:off x="10053066" y="5596128"/>
+            <a:ext cx="1681429" cy="611124"/>
           </a:xfrm>
           <a:prstGeom prst="rect">
             <a:avLst/>
@@ -3858,7 +4369,7 @@
                 <a:ea typeface="Calibri" pitchFamily="34" charset="-122"/>
                 <a:cs typeface="Calibri" pitchFamily="34" charset="-120"/>
               </a:rPr>
-              <a:t>5 consecutive failures → lane stops, rest ‘deferred’</a:t>
+              <a:t>run_until_complete: 1 h → 2 → 4 → 8 until the queue is empty</a:t>
             </a:r>
             <a:endParaRPr lang="en-US" sz="1100" dirty="0"/>
           </a:p>
@@ -3866,23 +4377,19 @@
       </p:sp>
       <p:sp>
         <p:nvSpPr>
-          <p:cNvPr id="87" name="Shape 85"/>
+          <p:cNvPr id="102" name="Shape 100"/>
           <p:cNvSpPr/>
           <p:nvPr/>
         </p:nvSpPr>
         <p:spPr>
           <a:xfrm>
-            <a:off x="4222394" y="5577840"/>
-            <a:ext cx="1827733" cy="566928"/>
-          </a:xfrm>
-          <a:prstGeom prst="roundRect">
-            <a:avLst>
-              <a:gd name="adj" fmla="val 8065"/>
-            </a:avLst>
-          </a:prstGeom>
-          <a:solidFill>
-            <a:srgbClr val="E7F3F4"/>
-          </a:solidFill>
+            <a:off x="384048" y="6326124"/>
+            <a:ext cx="11423599" cy="0"/>
+          </a:xfrm>
+          <a:prstGeom prst="line">
+            <a:avLst/>
+          </a:prstGeom>
+          <a:noFill/>
           <a:ln w="9525">
             <a:solidFill>
               <a:srgbClr val="C7D6D9"/>
@@ -3893,286 +4400,14 @@
       </p:sp>
       <p:sp>
         <p:nvSpPr>
-          <p:cNvPr id="88" name="Text 86"/>
-          <p:cNvSpPr txBox="1"/>
-          <p:nvPr/>
-        </p:nvSpPr>
-        <p:spPr>
-          <a:xfrm>
-            <a:off x="4286402" y="5577840"/>
-            <a:ext cx="1699717" cy="566928"/>
-          </a:xfrm>
-          <a:prstGeom prst="rect">
-            <a:avLst/>
-          </a:prstGeom>
-          <a:noFill/>
-          <a:ln/>
-        </p:spPr>
-        <p:txBody>
-          <a:bodyPr wrap="square" lIns="0" tIns="0" rIns="0" bIns="0" rtlCol="0" anchor="ctr"/>
-          <a:lstStyle/>
-          <a:p>
-            <a:pPr algn="ctr" indent="0" marL="0">
-              <a:lnSpc>
-                <a:spcPct val="95000"/>
-              </a:lnSpc>
-              <a:buNone/>
-            </a:pPr>
-            <a:r>
-              <a:rPr lang="en-US" sz="1100" dirty="0">
-                <a:solidFill>
-                  <a:srgbClr val="18262B"/>
-                </a:solidFill>
-                <a:latin typeface="Calibri" pitchFamily="34" charset="0"/>
-                <a:ea typeface="Calibri" pitchFamily="34" charset="-122"/>
-                <a:cs typeface="Calibri" pitchFamily="34" charset="-120"/>
-              </a:rPr>
-              <a:t>never raise on a transient error — Beam retries = hammering</a:t>
-            </a:r>
-            <a:endParaRPr lang="en-US" sz="1100" dirty="0"/>
-          </a:p>
-        </p:txBody>
-      </p:sp>
-      <p:sp>
-        <p:nvSpPr>
-          <p:cNvPr id="89" name="Shape 87"/>
-          <p:cNvSpPr/>
-          <p:nvPr/>
-        </p:nvSpPr>
-        <p:spPr>
-          <a:xfrm>
-            <a:off x="6141568" y="5577840"/>
-            <a:ext cx="1827733" cy="566928"/>
-          </a:xfrm>
-          <a:prstGeom prst="roundRect">
-            <a:avLst>
-              <a:gd name="adj" fmla="val 8065"/>
-            </a:avLst>
-          </a:prstGeom>
-          <a:solidFill>
-            <a:srgbClr val="E7F3F4"/>
-          </a:solidFill>
-          <a:ln w="9525">
-            <a:solidFill>
-              <a:srgbClr val="C7D6D9"/>
-            </a:solidFill>
-            <a:prstDash val="solid"/>
-          </a:ln>
-        </p:spPr>
-      </p:sp>
-      <p:sp>
-        <p:nvSpPr>
-          <p:cNvPr id="90" name="Text 88"/>
-          <p:cNvSpPr txBox="1"/>
-          <p:nvPr/>
-        </p:nvSpPr>
-        <p:spPr>
-          <a:xfrm>
-            <a:off x="6205576" y="5577840"/>
-            <a:ext cx="1699717" cy="566928"/>
-          </a:xfrm>
-          <a:prstGeom prst="rect">
-            <a:avLst/>
-          </a:prstGeom>
-          <a:noFill/>
-          <a:ln/>
-        </p:spPr>
-        <p:txBody>
-          <a:bodyPr wrap="square" lIns="0" tIns="0" rIns="0" bIns="0" rtlCol="0" anchor="ctr"/>
-          <a:lstStyle/>
-          <a:p>
-            <a:pPr algn="ctr" indent="0" marL="0">
-              <a:lnSpc>
-                <a:spcPct val="95000"/>
-              </a:lnSpc>
-              <a:buNone/>
-            </a:pPr>
-            <a:r>
-              <a:rPr lang="en-US" sz="1100" dirty="0">
-                <a:solidFill>
-                  <a:srgbClr val="18262B"/>
-                </a:solidFill>
-                <a:latin typeface="Calibri" pitchFamily="34" charset="0"/>
-                <a:ea typeface="Calibri" pitchFamily="34" charset="-122"/>
-                <a:cs typeface="Calibri" pitchFamily="34" charset="-120"/>
-              </a:rPr>
-              <a:t>one day per request; bytes ∝ question</a:t>
-            </a:r>
-            <a:endParaRPr lang="en-US" sz="1100" dirty="0"/>
-          </a:p>
-        </p:txBody>
-      </p:sp>
-      <p:sp>
-        <p:nvSpPr>
-          <p:cNvPr id="91" name="Shape 89"/>
-          <p:cNvSpPr/>
-          <p:nvPr/>
-        </p:nvSpPr>
-        <p:spPr>
-          <a:xfrm>
-            <a:off x="8060741" y="5577840"/>
-            <a:ext cx="1827733" cy="566928"/>
-          </a:xfrm>
-          <a:prstGeom prst="roundRect">
-            <a:avLst>
-              <a:gd name="adj" fmla="val 8065"/>
-            </a:avLst>
-          </a:prstGeom>
-          <a:solidFill>
-            <a:srgbClr val="E7F3F4"/>
-          </a:solidFill>
-          <a:ln w="9525">
-            <a:solidFill>
-              <a:srgbClr val="C7D6D9"/>
-            </a:solidFill>
-            <a:prstDash val="solid"/>
-          </a:ln>
-        </p:spPr>
-      </p:sp>
-      <p:sp>
-        <p:nvSpPr>
-          <p:cNvPr id="92" name="Text 90"/>
-          <p:cNvSpPr txBox="1"/>
-          <p:nvPr/>
-        </p:nvSpPr>
-        <p:spPr>
-          <a:xfrm>
-            <a:off x="8124749" y="5577840"/>
-            <a:ext cx="1699717" cy="566928"/>
-          </a:xfrm>
-          <a:prstGeom prst="rect">
-            <a:avLst/>
-          </a:prstGeom>
-          <a:noFill/>
-          <a:ln/>
-        </p:spPr>
-        <p:txBody>
-          <a:bodyPr wrap="square" lIns="0" tIns="0" rIns="0" bIns="0" rtlCol="0" anchor="ctr"/>
-          <a:lstStyle/>
-          <a:p>
-            <a:pPr algn="ctr" indent="0" marL="0">
-              <a:lnSpc>
-                <a:spcPct val="95000"/>
-              </a:lnSpc>
-              <a:buNone/>
-            </a:pPr>
-            <a:r>
-              <a:rPr lang="en-US" sz="1100" dirty="0">
-                <a:solidFill>
-                  <a:srgbClr val="18262B"/>
-                </a:solidFill>
-                <a:latin typeface="Calibri" pitchFamily="34" charset="0"/>
-                <a:ea typeface="Calibri" pitchFamily="34" charset="-122"/>
-                <a:cs typeface="Calibri" pitchFamily="34" charset="-120"/>
-              </a:rPr>
-              <a:t>≤ 60 Hub commits/h, batched</a:t>
-            </a:r>
-            <a:endParaRPr lang="en-US" sz="1100" dirty="0"/>
-          </a:p>
-        </p:txBody>
-      </p:sp>
-      <p:sp>
-        <p:nvSpPr>
-          <p:cNvPr id="93" name="Shape 91"/>
-          <p:cNvSpPr/>
-          <p:nvPr/>
-        </p:nvSpPr>
-        <p:spPr>
-          <a:xfrm>
-            <a:off x="9979914" y="5577840"/>
-            <a:ext cx="1827733" cy="566928"/>
-          </a:xfrm>
-          <a:prstGeom prst="roundRect">
-            <a:avLst>
-              <a:gd name="adj" fmla="val 8065"/>
-            </a:avLst>
-          </a:prstGeom>
-          <a:solidFill>
-            <a:srgbClr val="E7F3F4"/>
-          </a:solidFill>
-          <a:ln w="9525">
-            <a:solidFill>
-              <a:srgbClr val="C7D6D9"/>
-            </a:solidFill>
-            <a:prstDash val="solid"/>
-          </a:ln>
-        </p:spPr>
-      </p:sp>
-      <p:sp>
-        <p:nvSpPr>
-          <p:cNvPr id="94" name="Text 92"/>
-          <p:cNvSpPr txBox="1"/>
-          <p:nvPr/>
-        </p:nvSpPr>
-        <p:spPr>
-          <a:xfrm>
-            <a:off x="10043922" y="5577840"/>
-            <a:ext cx="1699717" cy="566928"/>
-          </a:xfrm>
-          <a:prstGeom prst="rect">
-            <a:avLst/>
-          </a:prstGeom>
-          <a:noFill/>
-          <a:ln/>
-        </p:spPr>
-        <p:txBody>
-          <a:bodyPr wrap="square" lIns="0" tIns="0" rIns="0" bIns="0" rtlCol="0" anchor="ctr"/>
-          <a:lstStyle/>
-          <a:p>
-            <a:pPr algn="ctr" indent="0" marL="0">
-              <a:lnSpc>
-                <a:spcPct val="95000"/>
-              </a:lnSpc>
-              <a:buNone/>
-            </a:pPr>
-            <a:r>
-              <a:rPr lang="en-US" sz="1100" dirty="0">
-                <a:solidFill>
-                  <a:srgbClr val="18262B"/>
-                </a:solidFill>
-                <a:latin typeface="Calibri" pitchFamily="34" charset="0"/>
-                <a:ea typeface="Calibri" pitchFamily="34" charset="-122"/>
-                <a:cs typeface="Calibri" pitchFamily="34" charset="-120"/>
-              </a:rPr>
-              <a:t>no credential in argv / options / rented boxes</a:t>
-            </a:r>
-            <a:endParaRPr lang="en-US" sz="1100" dirty="0"/>
-          </a:p>
-        </p:txBody>
-      </p:sp>
-      <p:sp>
-        <p:nvSpPr>
-          <p:cNvPr id="95" name="Shape 93"/>
-          <p:cNvSpPr/>
-          <p:nvPr/>
-        </p:nvSpPr>
-        <p:spPr>
-          <a:xfrm>
-            <a:off x="384048" y="6272784"/>
-            <a:ext cx="11423599" cy="0"/>
-          </a:xfrm>
-          <a:prstGeom prst="line">
-            <a:avLst/>
-          </a:prstGeom>
-          <a:noFill/>
-          <a:ln w="9525">
-            <a:solidFill>
-              <a:srgbClr val="C7D6D9"/>
-            </a:solidFill>
-            <a:prstDash val="solid"/>
-          </a:ln>
-        </p:spPr>
-      </p:sp>
-      <p:sp>
-        <p:nvSpPr>
-          <p:cNvPr id="96" name="Text 94"/>
-          <p:cNvSpPr txBox="1"/>
-          <p:nvPr/>
-        </p:nvSpPr>
-        <p:spPr>
-          <a:xfrm>
-            <a:off x="384048" y="6327648"/>
-            <a:ext cx="11423599" cy="402336"/>
+          <p:cNvPr id="103" name="Text 101"/>
+          <p:cNvSpPr txBox="1"/>
+          <p:nvPr/>
+        </p:nvSpPr>
+        <p:spPr>
+          <a:xfrm>
+            <a:off x="384048" y="6380988"/>
+            <a:ext cx="11423599" cy="401320"/>
           </a:xfrm>
           <a:prstGeom prst="rect">
             <a:avLst/>
@@ -4199,7 +4434,7 @@
                 <a:ea typeface="Calibri" pitchFamily="34" charset="-122"/>
                 <a:cs typeface="Calibri" pitchFamily="34" charset="-120"/>
               </a:rPr>
-              <a:t>Runs on one 8-vCPU VM, DirectRunner multi-process</a:t>
+              <a:t>One 8-vCPU VM, DirectRunner multi-process</a:t>
             </a:r>
             <a:pPr indent="0" marL="0">
               <a:lnSpc>
@@ -4216,7 +4451,7 @@
                 <a:ea typeface="Calibri" pitchFamily="34" charset="-122"/>
                 <a:cs typeface="Calibri" pitchFamily="34" charset="-120"/>
               </a:rPr>
-              <a:t> (lanes bound throughput; Dataflow is a flag change)   ·   </a:t>
+              <a:t> (lanes bound throughput; Dataflow / Flume is a runner change — size workers × threads to the registry's 29 lanes)   ·   </a:t>
             </a:r>
             <a:pPr indent="0" marL="0">
               <a:lnSpc>
@@ -4250,7 +4485,7 @@
                 <a:ea typeface="Calibri" pitchFamily="34" charset="-122"/>
                 <a:cs typeface="Calibri" pitchFamily="34" charset="-120"/>
               </a:rPr>
-              <a:t>verify_hub reports missing 0 + MANIFEST_tier0.json on the Hub   ·   </a:t>
+              <a:t>retry_queue empty + verify_output missing 0 + coverage.json complete   ·   </a:t>
             </a:r>
             <a:pPr indent="0" marL="0">
               <a:lnSpc>
@@ -4267,24 +4502,7 @@
                 <a:ea typeface="Calibri" pitchFamily="34" charset="-122"/>
                 <a:cs typeface="Calibri" pitchFamily="34" charset="-120"/>
               </a:rPr>
-              <a:t>Hand-over: </a:t>
-            </a:r>
-            <a:pPr indent="0" marL="0">
-              <a:lnSpc>
-                <a:spcPct val="98000"/>
-              </a:lnSpc>
-              <a:buNone/>
-            </a:pPr>
-            <a:r>
-              <a:rPr lang="en-US" sz="1100" dirty="0">
-                <a:solidFill>
-                  <a:srgbClr val="56666C"/>
-                </a:solidFill>
-                <a:latin typeface="Calibri" pitchFamily="34" charset="0"/>
-                <a:ea typeface="Calibri" pitchFamily="34" charset="-122"/>
-                <a:cs typeface="Calibri" pitchFamily="34" charset="-120"/>
-              </a:rPr>
-              <a:t>README_FOR_GEMINI.md + sources.yaml + beam_import/</a:t>
+              <a:t>90 tests + offline smoke pass</a:t>
             </a:r>
             <a:endParaRPr lang="en-US" sz="1100" dirty="0"/>
           </a:p>

--- a/ml/import_beam/slide/E073_parallel_import_design.pptx
+++ b/ml/import_beam/slide/E073_parallel_import_design.pptx
@@ -1051,7 +1051,7 @@
         <p:spPr>
           <a:xfrm>
             <a:off x="3557016" y="1097280"/>
-            <a:ext cx="4389120" cy="4114800"/>
+            <a:ext cx="4206240" cy="4114800"/>
           </a:xfrm>
           <a:prstGeom prst="rect">
             <a:avLst/>
@@ -1076,7 +1076,7 @@
         <p:spPr>
           <a:xfrm>
             <a:off x="3557016" y="804672"/>
-            <a:ext cx="4389120" cy="292608"/>
+            <a:ext cx="4206240" cy="292608"/>
           </a:xfrm>
           <a:prstGeom prst="rect">
             <a:avLst/>
@@ -1101,7 +1101,7 @@
         <p:spPr>
           <a:xfrm>
             <a:off x="3639312" y="804672"/>
-            <a:ext cx="4224528" cy="292608"/>
+            <a:ext cx="4041648" cy="292608"/>
           </a:xfrm>
           <a:prstGeom prst="rect">
             <a:avLst/>
@@ -1139,8 +1139,8 @@
         </p:nvSpPr>
         <p:spPr>
           <a:xfrm>
-            <a:off x="8147304" y="1097280"/>
-            <a:ext cx="3657600" cy="4114800"/>
+            <a:off x="7964424" y="1097280"/>
+            <a:ext cx="3840480" cy="4114800"/>
           </a:xfrm>
           <a:prstGeom prst="rect">
             <a:avLst/>
@@ -1164,8 +1164,8 @@
         </p:nvSpPr>
         <p:spPr>
           <a:xfrm>
-            <a:off x="8147304" y="804672"/>
-            <a:ext cx="3657600" cy="292608"/>
+            <a:off x="7964424" y="804672"/>
+            <a:ext cx="3840480" cy="292608"/>
           </a:xfrm>
           <a:prstGeom prst="rect">
             <a:avLst/>
@@ -1189,8 +1189,8 @@
         </p:nvSpPr>
         <p:spPr>
           <a:xfrm>
-            <a:off x="8229600" y="804672"/>
-            <a:ext cx="3493008" cy="292608"/>
+            <a:off x="8046720" y="804672"/>
+            <a:ext cx="3675888" cy="292608"/>
           </a:xfrm>
           <a:prstGeom prst="rect">
             <a:avLst/>
@@ -2622,7 +2622,7 @@
         <p:spPr>
           <a:xfrm>
             <a:off x="3648456" y="1179576"/>
-            <a:ext cx="4206240" cy="182880"/>
+            <a:ext cx="4023360" cy="164592"/>
           </a:xfrm>
           <a:prstGeom prst="rect">
             <a:avLst/>
@@ -2660,8 +2660,8 @@
         </p:nvSpPr>
         <p:spPr>
           <a:xfrm>
-            <a:off x="3648456" y="1362456"/>
-            <a:ext cx="4206240" cy="401320"/>
+            <a:off x="3648456" y="1344168"/>
+            <a:ext cx="4023360" cy="401320"/>
           </a:xfrm>
           <a:prstGeom prst="rect">
             <a:avLst/>
@@ -2685,8 +2685,8 @@
         </p:nvSpPr>
         <p:spPr>
           <a:xfrm>
-            <a:off x="3730752" y="1362456"/>
-            <a:ext cx="4041648" cy="401320"/>
+            <a:off x="3730752" y="1344168"/>
+            <a:ext cx="3858768" cy="401320"/>
           </a:xfrm>
           <a:prstGeom prst="rect">
             <a:avLst/>
@@ -2727,8 +2727,8 @@
         </p:nvSpPr>
         <p:spPr>
           <a:xfrm>
-            <a:off x="5687568" y="1778279"/>
-            <a:ext cx="128016" cy="91440"/>
+            <a:off x="5596128" y="1743202"/>
+            <a:ext cx="118872" cy="82296"/>
           </a:xfrm>
           <a:prstGeom prst="downArrow">
             <a:avLst/>
@@ -2752,8 +2752,8 @@
         </p:nvSpPr>
         <p:spPr>
           <a:xfrm>
-            <a:off x="3648456" y="1884223"/>
-            <a:ext cx="4206240" cy="228092"/>
+            <a:off x="3648456" y="1823212"/>
+            <a:ext cx="4023360" cy="228092"/>
           </a:xfrm>
           <a:prstGeom prst="rect">
             <a:avLst/>
@@ -2777,8 +2777,8 @@
         </p:nvSpPr>
         <p:spPr>
           <a:xfrm>
-            <a:off x="3730752" y="1884223"/>
-            <a:ext cx="4041648" cy="228092"/>
+            <a:off x="3730752" y="1823212"/>
+            <a:ext cx="3858768" cy="228092"/>
           </a:xfrm>
           <a:prstGeom prst="rect">
             <a:avLst/>
@@ -2819,8 +2819,8 @@
         </p:nvSpPr>
         <p:spPr>
           <a:xfrm>
-            <a:off x="5687568" y="2126818"/>
-            <a:ext cx="128016" cy="91440"/>
+            <a:off x="5596128" y="2049018"/>
+            <a:ext cx="118872" cy="82296"/>
           </a:xfrm>
           <a:prstGeom prst="downArrow">
             <a:avLst/>
@@ -2844,8 +2844,8 @@
         </p:nvSpPr>
         <p:spPr>
           <a:xfrm>
-            <a:off x="3648456" y="2232762"/>
-            <a:ext cx="4206240" cy="883666"/>
+            <a:off x="3648456" y="2129028"/>
+            <a:ext cx="4023360" cy="883666"/>
           </a:xfrm>
           <a:prstGeom prst="rect">
             <a:avLst/>
@@ -2869,8 +2869,8 @@
         </p:nvSpPr>
         <p:spPr>
           <a:xfrm>
-            <a:off x="3730752" y="2278482"/>
-            <a:ext cx="4041648" cy="217678"/>
+            <a:off x="3730752" y="2174748"/>
+            <a:ext cx="3858768" cy="217678"/>
           </a:xfrm>
           <a:prstGeom prst="rect">
             <a:avLst/>
@@ -2908,8 +2908,8 @@
         </p:nvSpPr>
         <p:spPr>
           <a:xfrm>
-            <a:off x="3794760" y="2496160"/>
-            <a:ext cx="3913632" cy="191516"/>
+            <a:off x="3794760" y="2392426"/>
+            <a:ext cx="3730752" cy="191516"/>
           </a:xfrm>
           <a:prstGeom prst="rect">
             <a:avLst/>
@@ -2950,8 +2950,8 @@
         </p:nvSpPr>
         <p:spPr>
           <a:xfrm>
-            <a:off x="3794760" y="2687676"/>
-            <a:ext cx="3913632" cy="191516"/>
+            <a:off x="3794760" y="2583942"/>
+            <a:ext cx="3730752" cy="191516"/>
           </a:xfrm>
           <a:prstGeom prst="rect">
             <a:avLst/>
@@ -2992,8 +2992,8 @@
         </p:nvSpPr>
         <p:spPr>
           <a:xfrm>
-            <a:off x="3794760" y="2879192"/>
-            <a:ext cx="3913632" cy="191516"/>
+            <a:off x="3794760" y="2775458"/>
+            <a:ext cx="3730752" cy="191516"/>
           </a:xfrm>
           <a:prstGeom prst="rect">
             <a:avLst/>
@@ -3034,8 +3034,8 @@
         </p:nvSpPr>
         <p:spPr>
           <a:xfrm>
-            <a:off x="3648456" y="3116428"/>
-            <a:ext cx="4206240" cy="410464"/>
+            <a:off x="3648456" y="3012694"/>
+            <a:ext cx="4023360" cy="410464"/>
           </a:xfrm>
           <a:prstGeom prst="rect">
             <a:avLst/>
@@ -3059,8 +3059,8 @@
         </p:nvSpPr>
         <p:spPr>
           <a:xfrm>
-            <a:off x="3730752" y="3116428"/>
-            <a:ext cx="4041648" cy="410464"/>
+            <a:off x="3730752" y="3012694"/>
+            <a:ext cx="3858768" cy="410464"/>
           </a:xfrm>
           <a:prstGeom prst="rect">
             <a:avLst/>
@@ -3101,8 +3101,8 @@
         </p:nvSpPr>
         <p:spPr>
           <a:xfrm>
-            <a:off x="5687568" y="3541395"/>
-            <a:ext cx="128016" cy="91440"/>
+            <a:off x="5596128" y="3420872"/>
+            <a:ext cx="118872" cy="82296"/>
           </a:xfrm>
           <a:prstGeom prst="downArrow">
             <a:avLst/>
@@ -3126,8 +3126,8 @@
         </p:nvSpPr>
         <p:spPr>
           <a:xfrm>
-            <a:off x="3648456" y="3647338"/>
-            <a:ext cx="4206240" cy="228092"/>
+            <a:off x="3648456" y="3500882"/>
+            <a:ext cx="4023360" cy="228092"/>
           </a:xfrm>
           <a:prstGeom prst="rect">
             <a:avLst/>
@@ -3151,8 +3151,8 @@
         </p:nvSpPr>
         <p:spPr>
           <a:xfrm>
-            <a:off x="3730752" y="3647338"/>
-            <a:ext cx="4041648" cy="228092"/>
+            <a:off x="3730752" y="3500882"/>
+            <a:ext cx="3858768" cy="228092"/>
           </a:xfrm>
           <a:prstGeom prst="rect">
             <a:avLst/>
@@ -3193,8 +3193,8 @@
         </p:nvSpPr>
         <p:spPr>
           <a:xfrm>
-            <a:off x="3648456" y="3934866"/>
-            <a:ext cx="4206240" cy="0"/>
+            <a:off x="3648456" y="3779266"/>
+            <a:ext cx="4023360" cy="0"/>
           </a:xfrm>
           <a:prstGeom prst="line">
             <a:avLst/>
@@ -3216,8 +3216,8 @@
         </p:nvSpPr>
         <p:spPr>
           <a:xfrm>
-            <a:off x="3648456" y="3994302"/>
-            <a:ext cx="4206240" cy="182880"/>
+            <a:off x="3648456" y="3829558"/>
+            <a:ext cx="4023360" cy="164592"/>
           </a:xfrm>
           <a:prstGeom prst="rect">
             <a:avLst/>
@@ -3241,7 +3241,7 @@
                 <a:ea typeface="Calibri" pitchFamily="34" charset="-122"/>
                 <a:cs typeface="Calibri" pitchFamily="34" charset="-120"/>
               </a:rPr>
-              <a:t>STAGE B · assemble — min_days applied here</a:t>
+              <a:t>STAGE B · assemble — a derived view at a chosen cadence</a:t>
             </a:r>
             <a:endParaRPr lang="en-US" sz="1100" dirty="0"/>
           </a:p>
@@ -3255,8 +3255,8 @@
         </p:nvSpPr>
         <p:spPr>
           <a:xfrm>
-            <a:off x="3648456" y="4177182"/>
-            <a:ext cx="4206240" cy="228092"/>
+            <a:off x="3648456" y="3994150"/>
+            <a:ext cx="4023360" cy="228092"/>
           </a:xfrm>
           <a:prstGeom prst="rect">
             <a:avLst/>
@@ -3280,8 +3280,8 @@
         </p:nvSpPr>
         <p:spPr>
           <a:xfrm>
-            <a:off x="3730752" y="4177182"/>
-            <a:ext cx="4041648" cy="228092"/>
+            <a:off x="3730752" y="3994150"/>
+            <a:ext cx="3858768" cy="228092"/>
           </a:xfrm>
           <a:prstGeom prst="rect">
             <a:avLst/>
@@ -3322,8 +3322,8 @@
         </p:nvSpPr>
         <p:spPr>
           <a:xfrm>
-            <a:off x="5687568" y="4419778"/>
-            <a:ext cx="128016" cy="91440"/>
+            <a:off x="5596128" y="4219956"/>
+            <a:ext cx="118872" cy="82296"/>
           </a:xfrm>
           <a:prstGeom prst="downArrow">
             <a:avLst/>
@@ -3347,8 +3347,8 @@
         </p:nvSpPr>
         <p:spPr>
           <a:xfrm>
-            <a:off x="3648456" y="4525721"/>
-            <a:ext cx="4206240" cy="228092"/>
+            <a:off x="3648456" y="4299966"/>
+            <a:ext cx="4023360" cy="401320"/>
           </a:xfrm>
           <a:prstGeom prst="rect">
             <a:avLst/>
@@ -3372,8 +3372,8 @@
         </p:nvSpPr>
         <p:spPr>
           <a:xfrm>
-            <a:off x="3730752" y="4525721"/>
-            <a:ext cx="4041648" cy="228092"/>
+            <a:off x="3730752" y="4299966"/>
+            <a:ext cx="3858768" cy="401320"/>
           </a:xfrm>
           <a:prstGeom prst="rect">
             <a:avLst/>
@@ -3400,7 +3400,7 @@
                 <a:ea typeface="Calibri" pitchFamily="34" charset="-122"/>
                 <a:cs typeface="Calibri" pitchFamily="34" charset="-120"/>
               </a:rPr>
-              <a:t>pentad mean/σ · g025 · g100 · rg100 · days_present mask</a:t>
+              <a:t>--cadence pentad | daily · mean/σ · g025 · g100 · rg100 · days_present · min_days applied here</a:t>
             </a:r>
             <a:endParaRPr lang="en-US" sz="1100" dirty="0"/>
           </a:p>
@@ -3414,8 +3414,8 @@
         </p:nvSpPr>
         <p:spPr>
           <a:xfrm>
-            <a:off x="5687568" y="4768317"/>
-            <a:ext cx="128016" cy="91440"/>
+            <a:off x="5596128" y="4699000"/>
+            <a:ext cx="118872" cy="82296"/>
           </a:xfrm>
           <a:prstGeom prst="downArrow">
             <a:avLst/>
@@ -3439,8 +3439,8 @@
         </p:nvSpPr>
         <p:spPr>
           <a:xfrm>
-            <a:off x="3648456" y="4874260"/>
-            <a:ext cx="4206240" cy="246380"/>
+            <a:off x="3648456" y="4779010"/>
+            <a:ext cx="4023360" cy="419608"/>
           </a:xfrm>
           <a:prstGeom prst="rect">
             <a:avLst/>
@@ -3464,8 +3464,8 @@
         </p:nvSpPr>
         <p:spPr>
           <a:xfrm>
-            <a:off x="3730752" y="4874260"/>
-            <a:ext cx="4041648" cy="246380"/>
+            <a:off x="3730752" y="4779010"/>
+            <a:ext cx="3858768" cy="419608"/>
           </a:xfrm>
           <a:prstGeom prst="rect">
             <a:avLst/>
@@ -3506,8 +3506,8 @@
         </p:nvSpPr>
         <p:spPr>
           <a:xfrm>
-            <a:off x="8238744" y="1170432"/>
-            <a:ext cx="3474720" cy="219456"/>
+            <a:off x="8055864" y="1170432"/>
+            <a:ext cx="3657600" cy="201168"/>
           </a:xfrm>
           <a:prstGeom prst="rect">
             <a:avLst/>
@@ -3531,8 +3531,8 @@
         </p:nvSpPr>
         <p:spPr>
           <a:xfrm>
-            <a:off x="8311896" y="1170432"/>
-            <a:ext cx="3328416" cy="219456"/>
+            <a:off x="8129016" y="1170432"/>
+            <a:ext cx="3511296" cy="201168"/>
           </a:xfrm>
           <a:prstGeom prst="rect">
             <a:avLst/>
@@ -3570,8 +3570,8 @@
         </p:nvSpPr>
         <p:spPr>
           <a:xfrm>
-            <a:off x="8257032" y="1417320"/>
-            <a:ext cx="3438144" cy="747776"/>
+            <a:off x="8074152" y="1399032"/>
+            <a:ext cx="3621024" cy="1094232"/>
           </a:xfrm>
           <a:prstGeom prst="rect">
             <a:avLst/>
@@ -3598,7 +3598,7 @@
                 <a:ea typeface="Calibri" pitchFamily="34" charset="-122"/>
                 <a:cs typeface="Calibri" pitchFamily="34" charset="-120"/>
               </a:rPr>
-              <a:t>&lt;source&gt;/&lt;item_id&gt;.tfrecord + .done · values float32 [C,H,W] + bit-packed mask · explicit axes · var_names/units · source_url/sha256/fetched_at · transform · units are the source's own, no z-scoring</a:t>
+              <a:t>&lt;source&gt;/&lt;item_id&gt;.tfrecord + .done · values float32 [C,H,W] + bit-packed mask · explicit axes · var_names/units · source_url/sha256/fetched_at · transform · units are the source's own, no z-scoring. Stage A is the daily archive; Stage B is a derived view, so the pentad and daily (multi-rate cone) datasets come from the same records with no refetch.</a:t>
             </a:r>
             <a:endParaRPr lang="en-US" sz="1100" dirty="0"/>
           </a:p>
@@ -3612,8 +3612,8 @@
         </p:nvSpPr>
         <p:spPr>
           <a:xfrm>
-            <a:off x="8238744" y="2334937"/>
-            <a:ext cx="3474720" cy="219456"/>
+            <a:off x="8055864" y="2629747"/>
+            <a:ext cx="3657600" cy="201168"/>
           </a:xfrm>
           <a:prstGeom prst="rect">
             <a:avLst/>
@@ -3637,8 +3637,8 @@
         </p:nvSpPr>
         <p:spPr>
           <a:xfrm>
-            <a:off x="8311896" y="2334937"/>
-            <a:ext cx="3328416" cy="219456"/>
+            <a:off x="8129016" y="2629747"/>
+            <a:ext cx="3511296" cy="201168"/>
           </a:xfrm>
           <a:prstGeom prst="rect">
             <a:avLst/>
@@ -3676,8 +3676,8 @@
         </p:nvSpPr>
         <p:spPr>
           <a:xfrm>
-            <a:off x="8257032" y="2581825"/>
-            <a:ext cx="3438144" cy="574548"/>
+            <a:off x="8074152" y="2858347"/>
+            <a:ext cx="3621024" cy="401320"/>
           </a:xfrm>
           <a:prstGeom prst="rect">
             <a:avLst/>
@@ -3704,7 +3704,7 @@
                 <a:ea typeface="Calibri" pitchFamily="34" charset="-122"/>
                 <a:cs typeface="Calibri" pitchFamily="34" charset="-120"/>
               </a:rPr>
-              <a:t>pentad/&lt;group&gt;/part-SSSSS-of-NNNNN · days_present per channel · spec.json carries the norms, so the split stays a trainer decision.</a:t>
+              <a:t>pentad/&lt;group&gt;/part-SSSSS-of-NNNNN · days_present per channel · spec.json carries the norms.</a:t>
             </a:r>
             <a:endParaRPr lang="en-US" sz="1100" dirty="0"/>
           </a:p>
@@ -3718,8 +3718,8 @@
         </p:nvSpPr>
         <p:spPr>
           <a:xfrm>
-            <a:off x="8238744" y="3326215"/>
-            <a:ext cx="3474720" cy="219456"/>
+            <a:off x="8055864" y="3396149"/>
+            <a:ext cx="3657600" cy="201168"/>
           </a:xfrm>
           <a:prstGeom prst="rect">
             <a:avLst/>
@@ -3743,8 +3743,8 @@
         </p:nvSpPr>
         <p:spPr>
           <a:xfrm>
-            <a:off x="8311896" y="3326215"/>
-            <a:ext cx="3328416" cy="219456"/>
+            <a:off x="8129016" y="3396149"/>
+            <a:ext cx="3511296" cy="201168"/>
           </a:xfrm>
           <a:prstGeom prst="rect">
             <a:avLst/>
@@ -3782,8 +3782,8 @@
         </p:nvSpPr>
         <p:spPr>
           <a:xfrm>
-            <a:off x="8257032" y="3573103"/>
-            <a:ext cx="3438144" cy="401320"/>
+            <a:off x="8074152" y="3624749"/>
+            <a:ext cx="3621024" cy="401320"/>
           </a:xfrm>
           <a:prstGeom prst="rect">
             <a:avLst/>
@@ -3824,8 +3824,8 @@
         </p:nvSpPr>
         <p:spPr>
           <a:xfrm>
-            <a:off x="8238744" y="4144264"/>
-            <a:ext cx="3474720" cy="219456"/>
+            <a:off x="8055864" y="4162552"/>
+            <a:ext cx="3657600" cy="201168"/>
           </a:xfrm>
           <a:prstGeom prst="rect">
             <a:avLst/>
@@ -3849,8 +3849,8 @@
         </p:nvSpPr>
         <p:spPr>
           <a:xfrm>
-            <a:off x="8311896" y="4144264"/>
-            <a:ext cx="3328416" cy="219456"/>
+            <a:off x="8129016" y="4162552"/>
+            <a:ext cx="3511296" cy="201168"/>
           </a:xfrm>
           <a:prstGeom prst="rect">
             <a:avLst/>
@@ -3874,7 +3874,7 @@
                 <a:ea typeface="Calibri" pitchFamily="34" charset="-122"/>
                 <a:cs typeface="Calibri" pitchFamily="34" charset="-120"/>
               </a:rPr>
-              <a:t>Tiers</a:t>
+              <a:t>Tiers (Tier 0 = family 7's inputs)</a:t>
             </a:r>
             <a:endParaRPr lang="en-US" sz="1150" dirty="0"/>
           </a:p>
@@ -3888,8 +3888,8 @@
         </p:nvSpPr>
         <p:spPr>
           <a:xfrm>
-            <a:off x="8257032" y="4391152"/>
-            <a:ext cx="3438144" cy="747776"/>
+            <a:off x="8074152" y="4391152"/>
+            <a:ext cx="3621024" cy="747776"/>
           </a:xfrm>
           <a:prstGeom prst="rect">
             <a:avLst/>
@@ -3916,7 +3916,7 @@
                 <a:ea typeface="Calibri" pitchFamily="34" charset="-122"/>
                 <a:cs typeface="Calibri" pitchFamily="34" charset="-120"/>
               </a:rPr>
-              <a:t>Tier 0 (family 7's inputs) 1,131 items · ~925 GB wire, 880 GB of it GLORYS — or ~185 GB via the optional mirror · Tier 1 DUACS + EN4/WWV/OLR/GODAS/ENSO · Tier 2 gated on Chris's free CDS account</a:t>
+              <a:t>Tier 0 1,131 items · ~925 GB wire, 880 GB GLORYS — or ~185 GB via the optional mirror · Tier 1 DUACS + EN4/WWV/OLR/GODAS/ENSO · Tier 2 gated on Chris's free CDS account</a:t>
             </a:r>
             <a:endParaRPr lang="en-US" sz="1100" dirty="0"/>
           </a:p>
